--- a/exports/pptx/lessons/middle-module-05-dot-addition/day-02-making-tens.pptx
+++ b/exports/pptx/lessons/middle-module-05-dot-addition/day-02-making-tens.pptx
@@ -17,9 +17,13 @@
     <p:sldId id="265" r:id="rId11"/>
     <p:sldId id="266" r:id="rId12"/>
     <p:sldId id="267" r:id="rId13"/>
+    <p:sldId id="268" r:id="rId14"/>
+    <p:sldId id="269" r:id="rId15"/>
+    <p:sldId id="270" r:id="rId16"/>
+    <p:sldId id="271" r:id="rId17"/>
   </p:sldIdLst>
   <p:notesMasterIdLst>
-    <p:notesMasterId r:id="rId14"/>
+    <p:notesMasterId r:id="rId18"/>
   </p:notesMasterIdLst>
   <p:sldSz cx="9144000" cy="5143500"/>
   <p:notesSz cx="5143500" cy="9144000"/>
@@ -801,6 +805,358 @@
             <a:fld id="{F7021451-1387-4CA6-816F-3879F97B5CBC}" type="slidenum">
               <a:rPr lang="en-US"/>
               <a:t>12</a:t>
+            </a:fld>
+            <a:endParaRPr lang="en-US"/>
+          </a:p>
+        </p:txBody>
+      </p:sp>
+    </p:spTree>
+    <p:extLst>
+      <p:ext uri="{BB962C8B-B14F-4D97-AF65-F5344CB8AC3E}">
+        <p14:creationId xmlns:p14="http://schemas.microsoft.com/office/powerpoint/2010/main" val="1024086991"/>
+      </p:ext>
+    </p:extLst>
+  </p:cSld>
+  <p:clrMapOvr>
+    <a:masterClrMapping/>
+  </p:clrMapOvr>
+</p:notes>
+</file>
+
+<file path=ppt/notesSlides/notesSlide13.xml><?xml version="1.0" encoding="utf-8"?>
+<p:notes xmlns:a="http://schemas.openxmlformats.org/drawingml/2006/main" xmlns:r="http://schemas.openxmlformats.org/officeDocument/2006/relationships" xmlns:p="http://schemas.openxmlformats.org/presentationml/2006/main">
+  <p:cSld>
+    <p:spTree>
+      <p:nvGrpSpPr>
+        <p:cNvPr id="1" name=""/>
+        <p:cNvGrpSpPr/>
+        <p:nvPr/>
+      </p:nvGrpSpPr>
+      <p:grpSpPr>
+        <a:xfrm>
+          <a:off x="0" y="0"/>
+          <a:ext cx="0" cy="0"/>
+          <a:chOff x="0" y="0"/>
+          <a:chExt cx="0" cy="0"/>
+        </a:xfrm>
+      </p:grpSpPr>
+      <p:sp>
+        <p:nvSpPr>
+          <p:cNvPr id="2" name="Slide Image Placeholder 1"/>
+          <p:cNvSpPr>
+            <a:spLocks noGrp="1" noRot="1" noChangeAspect="1"/>
+          </p:cNvSpPr>
+          <p:nvPr>
+            <p:ph type="sldImg"/>
+          </p:nvPr>
+        </p:nvSpPr>
+        <p:spPr/>
+      </p:sp>
+      <p:sp>
+        <p:nvSpPr>
+          <p:cNvPr id="3" name="Notes Placeholder 2"/>
+          <p:cNvSpPr>
+            <a:spLocks noGrp="1"/>
+          </p:cNvSpPr>
+          <p:nvPr>
+            <p:ph type="body" idx="1"/>
+          </p:nvPr>
+        </p:nvSpPr>
+        <p:spPr/>
+        <p:txBody>
+          <a:bodyPr/>
+          <a:lstStyle/>
+          <a:p>
+            <a:r>
+              <a:rPr lang="en-US" dirty="0"/>
+              <a:t/>
+            </a:r>
+            <a:endParaRPr lang="en-US" dirty="0"/>
+          </a:p>
+        </p:txBody>
+      </p:sp>
+      <p:sp>
+        <p:nvSpPr>
+          <p:cNvPr id="4" name="Slide Number Placeholder 3"/>
+          <p:cNvSpPr>
+            <a:spLocks noGrp="1"/>
+          </p:cNvSpPr>
+          <p:nvPr>
+            <p:ph type="sldNum" sz="quarter" idx="10"/>
+          </p:nvPr>
+        </p:nvSpPr>
+        <p:spPr/>
+        <p:txBody>
+          <a:bodyPr/>
+          <a:lstStyle/>
+          <a:p>
+            <a:fld id="{F7021451-1387-4CA6-816F-3879F97B5CBC}" type="slidenum">
+              <a:rPr lang="en-US"/>
+              <a:t>13</a:t>
+            </a:fld>
+            <a:endParaRPr lang="en-US"/>
+          </a:p>
+        </p:txBody>
+      </p:sp>
+    </p:spTree>
+    <p:extLst>
+      <p:ext uri="{BB962C8B-B14F-4D97-AF65-F5344CB8AC3E}">
+        <p14:creationId xmlns:p14="http://schemas.microsoft.com/office/powerpoint/2010/main" val="1024086991"/>
+      </p:ext>
+    </p:extLst>
+  </p:cSld>
+  <p:clrMapOvr>
+    <a:masterClrMapping/>
+  </p:clrMapOvr>
+</p:notes>
+</file>
+
+<file path=ppt/notesSlides/notesSlide14.xml><?xml version="1.0" encoding="utf-8"?>
+<p:notes xmlns:a="http://schemas.openxmlformats.org/drawingml/2006/main" xmlns:r="http://schemas.openxmlformats.org/officeDocument/2006/relationships" xmlns:p="http://schemas.openxmlformats.org/presentationml/2006/main">
+  <p:cSld>
+    <p:spTree>
+      <p:nvGrpSpPr>
+        <p:cNvPr id="1" name=""/>
+        <p:cNvGrpSpPr/>
+        <p:nvPr/>
+      </p:nvGrpSpPr>
+      <p:grpSpPr>
+        <a:xfrm>
+          <a:off x="0" y="0"/>
+          <a:ext cx="0" cy="0"/>
+          <a:chOff x="0" y="0"/>
+          <a:chExt cx="0" cy="0"/>
+        </a:xfrm>
+      </p:grpSpPr>
+      <p:sp>
+        <p:nvSpPr>
+          <p:cNvPr id="2" name="Slide Image Placeholder 1"/>
+          <p:cNvSpPr>
+            <a:spLocks noGrp="1" noRot="1" noChangeAspect="1"/>
+          </p:cNvSpPr>
+          <p:nvPr>
+            <p:ph type="sldImg"/>
+          </p:nvPr>
+        </p:nvSpPr>
+        <p:spPr/>
+      </p:sp>
+      <p:sp>
+        <p:nvSpPr>
+          <p:cNvPr id="3" name="Notes Placeholder 2"/>
+          <p:cNvSpPr>
+            <a:spLocks noGrp="1"/>
+          </p:cNvSpPr>
+          <p:nvPr>
+            <p:ph type="body" idx="1"/>
+          </p:nvPr>
+        </p:nvSpPr>
+        <p:spPr/>
+        <p:txBody>
+          <a:bodyPr/>
+          <a:lstStyle/>
+          <a:p>
+            <a:r>
+              <a:rPr lang="en-US" dirty="0"/>
+              <a:t/>
+            </a:r>
+            <a:endParaRPr lang="en-US" dirty="0"/>
+          </a:p>
+        </p:txBody>
+      </p:sp>
+      <p:sp>
+        <p:nvSpPr>
+          <p:cNvPr id="4" name="Slide Number Placeholder 3"/>
+          <p:cNvSpPr>
+            <a:spLocks noGrp="1"/>
+          </p:cNvSpPr>
+          <p:nvPr>
+            <p:ph type="sldNum" sz="quarter" idx="10"/>
+          </p:nvPr>
+        </p:nvSpPr>
+        <p:spPr/>
+        <p:txBody>
+          <a:bodyPr/>
+          <a:lstStyle/>
+          <a:p>
+            <a:fld id="{F7021451-1387-4CA6-816F-3879F97B5CBC}" type="slidenum">
+              <a:rPr lang="en-US"/>
+              <a:t>14</a:t>
+            </a:fld>
+            <a:endParaRPr lang="en-US"/>
+          </a:p>
+        </p:txBody>
+      </p:sp>
+    </p:spTree>
+    <p:extLst>
+      <p:ext uri="{BB962C8B-B14F-4D97-AF65-F5344CB8AC3E}">
+        <p14:creationId xmlns:p14="http://schemas.microsoft.com/office/powerpoint/2010/main" val="1024086991"/>
+      </p:ext>
+    </p:extLst>
+  </p:cSld>
+  <p:clrMapOvr>
+    <a:masterClrMapping/>
+  </p:clrMapOvr>
+</p:notes>
+</file>
+
+<file path=ppt/notesSlides/notesSlide15.xml><?xml version="1.0" encoding="utf-8"?>
+<p:notes xmlns:a="http://schemas.openxmlformats.org/drawingml/2006/main" xmlns:r="http://schemas.openxmlformats.org/officeDocument/2006/relationships" xmlns:p="http://schemas.openxmlformats.org/presentationml/2006/main">
+  <p:cSld>
+    <p:spTree>
+      <p:nvGrpSpPr>
+        <p:cNvPr id="1" name=""/>
+        <p:cNvGrpSpPr/>
+        <p:nvPr/>
+      </p:nvGrpSpPr>
+      <p:grpSpPr>
+        <a:xfrm>
+          <a:off x="0" y="0"/>
+          <a:ext cx="0" cy="0"/>
+          <a:chOff x="0" y="0"/>
+          <a:chExt cx="0" cy="0"/>
+        </a:xfrm>
+      </p:grpSpPr>
+      <p:sp>
+        <p:nvSpPr>
+          <p:cNvPr id="2" name="Slide Image Placeholder 1"/>
+          <p:cNvSpPr>
+            <a:spLocks noGrp="1" noRot="1" noChangeAspect="1"/>
+          </p:cNvSpPr>
+          <p:nvPr>
+            <p:ph type="sldImg"/>
+          </p:nvPr>
+        </p:nvSpPr>
+        <p:spPr/>
+      </p:sp>
+      <p:sp>
+        <p:nvSpPr>
+          <p:cNvPr id="3" name="Notes Placeholder 2"/>
+          <p:cNvSpPr>
+            <a:spLocks noGrp="1"/>
+          </p:cNvSpPr>
+          <p:nvPr>
+            <p:ph type="body" idx="1"/>
+          </p:nvPr>
+        </p:nvSpPr>
+        <p:spPr/>
+        <p:txBody>
+          <a:bodyPr/>
+          <a:lstStyle/>
+          <a:p>
+            <a:r>
+              <a:rPr lang="en-US" dirty="0"/>
+              <a:t/>
+            </a:r>
+            <a:endParaRPr lang="en-US" dirty="0"/>
+          </a:p>
+        </p:txBody>
+      </p:sp>
+      <p:sp>
+        <p:nvSpPr>
+          <p:cNvPr id="4" name="Slide Number Placeholder 3"/>
+          <p:cNvSpPr>
+            <a:spLocks noGrp="1"/>
+          </p:cNvSpPr>
+          <p:nvPr>
+            <p:ph type="sldNum" sz="quarter" idx="10"/>
+          </p:nvPr>
+        </p:nvSpPr>
+        <p:spPr/>
+        <p:txBody>
+          <a:bodyPr/>
+          <a:lstStyle/>
+          <a:p>
+            <a:fld id="{F7021451-1387-4CA6-816F-3879F97B5CBC}" type="slidenum">
+              <a:rPr lang="en-US"/>
+              <a:t>15</a:t>
+            </a:fld>
+            <a:endParaRPr lang="en-US"/>
+          </a:p>
+        </p:txBody>
+      </p:sp>
+    </p:spTree>
+    <p:extLst>
+      <p:ext uri="{BB962C8B-B14F-4D97-AF65-F5344CB8AC3E}">
+        <p14:creationId xmlns:p14="http://schemas.microsoft.com/office/powerpoint/2010/main" val="1024086991"/>
+      </p:ext>
+    </p:extLst>
+  </p:cSld>
+  <p:clrMapOvr>
+    <a:masterClrMapping/>
+  </p:clrMapOvr>
+</p:notes>
+</file>
+
+<file path=ppt/notesSlides/notesSlide16.xml><?xml version="1.0" encoding="utf-8"?>
+<p:notes xmlns:a="http://schemas.openxmlformats.org/drawingml/2006/main" xmlns:r="http://schemas.openxmlformats.org/officeDocument/2006/relationships" xmlns:p="http://schemas.openxmlformats.org/presentationml/2006/main">
+  <p:cSld>
+    <p:spTree>
+      <p:nvGrpSpPr>
+        <p:cNvPr id="1" name=""/>
+        <p:cNvGrpSpPr/>
+        <p:nvPr/>
+      </p:nvGrpSpPr>
+      <p:grpSpPr>
+        <a:xfrm>
+          <a:off x="0" y="0"/>
+          <a:ext cx="0" cy="0"/>
+          <a:chOff x="0" y="0"/>
+          <a:chExt cx="0" cy="0"/>
+        </a:xfrm>
+      </p:grpSpPr>
+      <p:sp>
+        <p:nvSpPr>
+          <p:cNvPr id="2" name="Slide Image Placeholder 1"/>
+          <p:cNvSpPr>
+            <a:spLocks noGrp="1" noRot="1" noChangeAspect="1"/>
+          </p:cNvSpPr>
+          <p:nvPr>
+            <p:ph type="sldImg"/>
+          </p:nvPr>
+        </p:nvSpPr>
+        <p:spPr/>
+      </p:sp>
+      <p:sp>
+        <p:nvSpPr>
+          <p:cNvPr id="3" name="Notes Placeholder 2"/>
+          <p:cNvSpPr>
+            <a:spLocks noGrp="1"/>
+          </p:cNvSpPr>
+          <p:nvPr>
+            <p:ph type="body" idx="1"/>
+          </p:nvPr>
+        </p:nvSpPr>
+        <p:spPr/>
+        <p:txBody>
+          <a:bodyPr/>
+          <a:lstStyle/>
+          <a:p>
+            <a:r>
+              <a:rPr lang="en-US" dirty="0"/>
+              <a:t/>
+            </a:r>
+            <a:endParaRPr lang="en-US" dirty="0"/>
+          </a:p>
+        </p:txBody>
+      </p:sp>
+      <p:sp>
+        <p:nvSpPr>
+          <p:cNvPr id="4" name="Slide Number Placeholder 3"/>
+          <p:cNvSpPr>
+            <a:spLocks noGrp="1"/>
+          </p:cNvSpPr>
+          <p:nvPr>
+            <p:ph type="sldNum" sz="quarter" idx="10"/>
+          </p:nvPr>
+        </p:nvSpPr>
+        <p:spPr/>
+        <p:txBody>
+          <a:bodyPr/>
+          <a:lstStyle/>
+          <a:p>
+            <a:fld id="{F7021451-1387-4CA6-816F-3879F97B5CBC}" type="slidenum">
+              <a:rPr lang="en-US"/>
+              <a:t>16</a:t>
             </a:fld>
             <a:endParaRPr lang="en-US"/>
           </a:p>
@@ -2100,102 +2456,6 @@
         </p:nvSpPr>
         <p:spPr>
           <a:xfrm>
-            <a:off x="406301" y="1223963"/>
-            <a:ext cx="8498026" cy="274290"/>
-          </a:xfrm>
-          <a:prstGeom prst="rect">
-            <a:avLst/>
-          </a:prstGeom>
-          <a:noFill/>
-          <a:ln/>
-        </p:spPr>
-        <p:txBody>
-          <a:bodyPr wrap="square" lIns="0" tIns="0" rIns="0" bIns="0" rtlCol="0" anchor="t"/>
-          <a:lstStyle/>
-          <a:p>
-            <a:pPr algn="l" indent="0" marL="0">
-              <a:lnSpc>
-                <a:spcPts val="2160"/>
-              </a:lnSpc>
-              <a:spcBef>
-                <a:spcPts val="600"/>
-              </a:spcBef>
-              <a:spcAft>
-                <a:spcPts val="800"/>
-              </a:spcAft>
-              <a:buNone/>
-            </a:pPr>
-            <a:r>
-              <a:rPr lang="en-US" sz="1800" b="1" dirty="0">
-                <a:solidFill>
-                  <a:srgbClr val="FE4447"/>
-                </a:solidFill>
-                <a:latin typeface="Georgia" pitchFamily="34" charset="0"/>
-                <a:ea typeface="Georgia" pitchFamily="34" charset="-122"/>
-                <a:cs typeface="Georgia" pitchFamily="34" charset="-120"/>
-              </a:rPr>
-              <a:t>Learning objective</a:t>
-            </a:r>
-            <a:endParaRPr lang="en-US" sz="1800" dirty="0"/>
-          </a:p>
-        </p:txBody>
-      </p:sp>
-      <p:sp>
-        <p:nvSpPr>
-          <p:cNvPr id="6" name="Text 4"/>
-          <p:cNvSpPr/>
-          <p:nvPr/>
-        </p:nvSpPr>
-        <p:spPr>
-          <a:xfrm>
-            <a:off x="406301" y="1637854"/>
-            <a:ext cx="8498026" cy="426541"/>
-          </a:xfrm>
-          <a:prstGeom prst="rect">
-            <a:avLst/>
-          </a:prstGeom>
-          <a:noFill/>
-          <a:ln/>
-        </p:spPr>
-        <p:txBody>
-          <a:bodyPr wrap="square" lIns="0" tIns="0" rIns="0" bIns="0" rtlCol="0" anchor="t"/>
-          <a:lstStyle/>
-          <a:p>
-            <a:pPr algn="l" indent="0" marL="0">
-              <a:lnSpc>
-                <a:spcPts val="1680"/>
-              </a:lnSpc>
-              <a:spcBef>
-                <a:spcPts val="300"/>
-              </a:spcBef>
-              <a:spcAft>
-                <a:spcPts val="300"/>
-              </a:spcAft>
-              <a:buNone/>
-            </a:pPr>
-            <a:r>
-              <a:rPr lang="en-US" sz="1200" dirty="0">
-                <a:solidFill>
-                  <a:srgbClr val="1C2833"/>
-                </a:solidFill>
-                <a:latin typeface="Arial" pitchFamily="34" charset="0"/>
-                <a:ea typeface="Arial" pitchFamily="34" charset="-122"/>
-                <a:cs typeface="Arial" pitchFamily="34" charset="-120"/>
-              </a:rPr>
-              <a:t>By the end of this lesson, students will instantly recall the 10-pair of any single digit (0+10, 1+9, 2+8, 3+7, 4+6, 5+5) AND identify all 10-pairs in a list of 6–8 single-digit numbers in under 10 seconds.</a:t>
-            </a:r>
-            <a:endParaRPr lang="en-US" sz="1200" dirty="0"/>
-          </a:p>
-        </p:txBody>
-      </p:sp>
-      <p:sp>
-        <p:nvSpPr>
-          <p:cNvPr id="7" name="Text 5"/>
-          <p:cNvSpPr/>
-          <p:nvPr/>
-        </p:nvSpPr>
-        <p:spPr>
-          <a:xfrm>
             <a:off x="406301" y="4434929"/>
             <a:ext cx="8498026" cy="213271"/>
           </a:xfrm>
@@ -2340,7 +2600,7 @@
                 <a:ea typeface="Georgia" pitchFamily="34" charset="-122"/>
                 <a:cs typeface="Georgia" pitchFamily="34" charset="-120"/>
               </a:rPr>
-              <a:t>Differentiation</a:t>
+              <a:t>Activity (20 min) — Pair drills (cont.)</a:t>
             </a:r>
             <a:endParaRPr lang="en-US" sz="1800" dirty="0"/>
           </a:p>
@@ -2354,8 +2614,8 @@
         </p:nvSpPr>
         <p:spPr>
           <a:xfrm>
-            <a:off x="634901" y="883593"/>
-            <a:ext cx="8102798" cy="525661"/>
+            <a:off x="406301" y="870942"/>
+            <a:ext cx="8498026" cy="426541"/>
           </a:xfrm>
           <a:prstGeom prst="rect">
             <a:avLst/>
@@ -2367,18 +2627,20 @@
           <a:bodyPr wrap="square" lIns="0" tIns="0" rIns="0" bIns="0" rtlCol="0" anchor="t"/>
           <a:lstStyle/>
           <a:p>
-            <a:pPr algn="l" marL="342900" indent="-342900">
-              <a:lnSpc>
-                <a:spcPts val="1620"/>
-              </a:lnSpc>
-              <a:spcAft>
-                <a:spcPts val="300"/>
-              </a:spcAft>
-              <a:buSzPct val="100000"/>
-              <a:buChar char="•"/>
-            </a:pPr>
-            <a:r>
-              <a:rPr lang="en-US" sz="1200" b="1" dirty="0">
+            <a:pPr algn="l" indent="0" marL="0">
+              <a:lnSpc>
+                <a:spcPts val="1680"/>
+              </a:lnSpc>
+              <a:spcBef>
+                <a:spcPts val="300"/>
+              </a:spcBef>
+              <a:spcAft>
+                <a:spcPts val="300"/>
+              </a:spcAft>
+              <a:buNone/>
+            </a:pPr>
+            <a:r>
+              <a:rPr lang="en-US" sz="1200" dirty="0">
                 <a:solidFill>
                   <a:srgbClr val="1C2833"/>
                 </a:solidFill>
@@ -2386,19 +2648,22 @@
                 <a:ea typeface="Arial" pitchFamily="34" charset="-122"/>
                 <a:cs typeface="Arial" pitchFamily="34" charset="-120"/>
               </a:rPr>
-              <a:t>Tier up:</a:t>
-            </a:r>
-            <a:pPr algn="l" indent="0" marL="0">
-              <a:lnSpc>
-                <a:spcPts val="1620"/>
-              </a:lnSpc>
-              <a:spcAft>
-                <a:spcPts val="300"/>
-              </a:spcAft>
-              <a:buNone/>
-            </a:pPr>
-            <a:r>
-              <a:rPr lang="en-US" sz="1200" dirty="0">
+              <a:t>After 5 minutes of paired drills, do a class-level </a:t>
+            </a:r>
+            <a:pPr algn="l" indent="0" marL="0">
+              <a:lnSpc>
+                <a:spcPts val="1680"/>
+              </a:lnSpc>
+              <a:spcBef>
+                <a:spcPts val="300"/>
+              </a:spcBef>
+              <a:spcAft>
+                <a:spcPts val="300"/>
+              </a:spcAft>
+              <a:buNone/>
+            </a:pPr>
+            <a:r>
+              <a:rPr lang="en-US" sz="1200" b="1" dirty="0">
                 <a:solidFill>
                   <a:srgbClr val="1C2833"/>
                 </a:solidFill>
@@ -2406,23 +2671,22 @@
                 <a:ea typeface="Arial" pitchFamily="34" charset="-122"/>
                 <a:cs typeface="Arial" pitchFamily="34" charset="-120"/>
               </a:rPr>
-              <a:t> Find pairs that sum to 9 OR 10 OR 11. (For future Day 7 — numbers near a base.)</a:t>
-            </a:r>
-            <a:endParaRPr lang="en-US" sz="1200" dirty="0"/>
-          </a:p>
-          <a:p>
-            <a:pPr algn="l" marL="342900" indent="-342900">
-              <a:lnSpc>
-                <a:spcPts val="1620"/>
-              </a:lnSpc>
-              <a:spcAft>
-                <a:spcPts val="300"/>
-              </a:spcAft>
-              <a:buSzPct val="100000"/>
-              <a:buChar char="•"/>
-            </a:pPr>
-            <a:r>
-              <a:rPr lang="en-US" sz="1200" b="1" dirty="0">
+              <a:t>timing test</a:t>
+            </a:r>
+            <a:pPr algn="l" indent="0" marL="0">
+              <a:lnSpc>
+                <a:spcPts val="1680"/>
+              </a:lnSpc>
+              <a:spcBef>
+                <a:spcPts val="300"/>
+              </a:spcBef>
+              <a:spcAft>
+                <a:spcPts val="300"/>
+              </a:spcAft>
+              <a:buNone/>
+            </a:pPr>
+            <a:r>
+              <a:rPr lang="en-US" sz="1200" dirty="0">
                 <a:solidFill>
                   <a:srgbClr val="1C2833"/>
                 </a:solidFill>
@@ -2430,27 +2694,7 @@
                 <a:ea typeface="Arial" pitchFamily="34" charset="-122"/>
                 <a:cs typeface="Arial" pitchFamily="34" charset="-120"/>
               </a:rPr>
-              <a:t>Tier down:</a:t>
-            </a:r>
-            <a:pPr algn="l" indent="0" marL="0">
-              <a:lnSpc>
-                <a:spcPts val="1620"/>
-              </a:lnSpc>
-              <a:spcAft>
-                <a:spcPts val="300"/>
-              </a:spcAft>
-              <a:buNone/>
-            </a:pPr>
-            <a:r>
-              <a:rPr lang="en-US" sz="1200" dirty="0">
-                <a:solidFill>
-                  <a:srgbClr val="1C2833"/>
-                </a:solidFill>
-                <a:latin typeface="Arial" pitchFamily="34" charset="0"/>
-                <a:ea typeface="Arial" pitchFamily="34" charset="-122"/>
-                <a:cs typeface="Arial" pitchFamily="34" charset="-120"/>
-              </a:rPr>
-              <a:t> Stick to recall-only practice today. The column work can wait one day.</a:t>
+              <a:t>: project a single row; students individually find all 10-pairs and write count + leftover. 20 seconds per row. Do 5 rows.</a:t>
             </a:r>
             <a:endParaRPr lang="en-US" sz="1200" dirty="0"/>
           </a:p>
@@ -2608,7 +2852,7 @@
                 <a:ea typeface="Georgia" pitchFamily="34" charset="-122"/>
                 <a:cs typeface="Georgia" pitchFamily="34" charset="-120"/>
               </a:rPr>
-              <a:t>Teacher notes</a:t>
+              <a:t>Wrap-up (5 min)</a:t>
             </a:r>
             <a:endParaRPr lang="en-US" sz="1800" dirty="0"/>
           </a:p>
@@ -2622,8 +2866,8 @@
         </p:nvSpPr>
         <p:spPr>
           <a:xfrm>
-            <a:off x="406301" y="870942"/>
-            <a:ext cx="8498026" cy="639812"/>
+            <a:off x="634901" y="883593"/>
+            <a:ext cx="8102798" cy="525661"/>
           </a:xfrm>
           <a:prstGeom prst="rect">
             <a:avLst/>
@@ -2635,17 +2879,15 @@
           <a:bodyPr wrap="square" lIns="0" tIns="0" rIns="0" bIns="0" rtlCol="0" anchor="t"/>
           <a:lstStyle/>
           <a:p>
-            <a:pPr algn="l" indent="0" marL="0">
-              <a:lnSpc>
-                <a:spcPts val="1680"/>
-              </a:lnSpc>
-              <a:spcBef>
-                <a:spcPts val="300"/>
-              </a:spcBef>
-              <a:spcAft>
-                <a:spcPts val="300"/>
-              </a:spcAft>
-              <a:buNone/>
+            <a:pPr algn="l" marL="342900" indent="-342900">
+              <a:lnSpc>
+                <a:spcPts val="1620"/>
+              </a:lnSpc>
+              <a:spcAft>
+                <a:spcPts val="300"/>
+              </a:spcAft>
+              <a:buSzPct val="100000"/>
+              <a:buChar char="•"/>
             </a:pPr>
             <a:r>
               <a:rPr lang="en-US" sz="1200" dirty="0">
@@ -2656,7 +2898,151 @@
                 <a:ea typeface="Arial" pitchFamily="34" charset="-122"/>
                 <a:cs typeface="Arial" pitchFamily="34" charset="-120"/>
               </a:rPr>
-              <a:t>– This is the most important fluency lesson of the module. Do NOT skip the lightning round. – If a student can't recall pairs by end of class, assign extra drill at home and provide a "pairs cheat sheet" for the rest of the module — withdraw it on Day 7.</a:t>
+              <a:t>Quick check: </a:t>
+            </a:r>
+            <a:pPr algn="l" indent="0" marL="0">
+              <a:lnSpc>
+                <a:spcPts val="1620"/>
+              </a:lnSpc>
+              <a:spcAft>
+                <a:spcPts val="300"/>
+              </a:spcAft>
+              <a:buNone/>
+            </a:pPr>
+            <a:r>
+              <a:rPr lang="en-US" sz="1200" i="1" dirty="0">
+                <a:solidFill>
+                  <a:srgbClr val="1C2833"/>
+                </a:solidFill>
+                <a:latin typeface="Arial" pitchFamily="34" charset="0"/>
+                <a:ea typeface="Arial" pitchFamily="34" charset="-122"/>
+                <a:cs typeface="Arial" pitchFamily="34" charset="-120"/>
+              </a:rPr>
+              <a:t>"Without thinking, what makes 10 with: 6?"</a:t>
+            </a:r>
+            <a:pPr algn="l" indent="0" marL="0">
+              <a:lnSpc>
+                <a:spcPts val="1620"/>
+              </a:lnSpc>
+              <a:spcAft>
+                <a:spcPts val="300"/>
+              </a:spcAft>
+              <a:buNone/>
+            </a:pPr>
+            <a:r>
+              <a:rPr lang="en-US" sz="1200" dirty="0">
+                <a:solidFill>
+                  <a:srgbClr val="1C2833"/>
+                </a:solidFill>
+                <a:latin typeface="Arial" pitchFamily="34" charset="0"/>
+                <a:ea typeface="Arial" pitchFamily="34" charset="-122"/>
+                <a:cs typeface="Arial" pitchFamily="34" charset="-120"/>
+              </a:rPr>
+              <a:t> (chorus 4). </a:t>
+            </a:r>
+            <a:pPr algn="l" indent="0" marL="0">
+              <a:lnSpc>
+                <a:spcPts val="1620"/>
+              </a:lnSpc>
+              <a:spcAft>
+                <a:spcPts val="300"/>
+              </a:spcAft>
+              <a:buNone/>
+            </a:pPr>
+            <a:r>
+              <a:rPr lang="en-US" sz="1200" i="1" dirty="0">
+                <a:solidFill>
+                  <a:srgbClr val="1C2833"/>
+                </a:solidFill>
+                <a:latin typeface="Arial" pitchFamily="34" charset="0"/>
+                <a:ea typeface="Arial" pitchFamily="34" charset="-122"/>
+                <a:cs typeface="Arial" pitchFamily="34" charset="-120"/>
+              </a:rPr>
+              <a:t>"With 8?"</a:t>
+            </a:r>
+            <a:pPr algn="l" indent="0" marL="0">
+              <a:lnSpc>
+                <a:spcPts val="1620"/>
+              </a:lnSpc>
+              <a:spcAft>
+                <a:spcPts val="300"/>
+              </a:spcAft>
+              <a:buNone/>
+            </a:pPr>
+            <a:r>
+              <a:rPr lang="en-US" sz="1200" dirty="0">
+                <a:solidFill>
+                  <a:srgbClr val="1C2833"/>
+                </a:solidFill>
+                <a:latin typeface="Arial" pitchFamily="34" charset="0"/>
+                <a:ea typeface="Arial" pitchFamily="34" charset="-122"/>
+                <a:cs typeface="Arial" pitchFamily="34" charset="-120"/>
+              </a:rPr>
+              <a:t> (chorus 2).</a:t>
+            </a:r>
+            <a:endParaRPr lang="en-US" sz="1200" dirty="0"/>
+          </a:p>
+          <a:p>
+            <a:pPr algn="l" marL="342900" indent="-342900">
+              <a:lnSpc>
+                <a:spcPts val="1620"/>
+              </a:lnSpc>
+              <a:spcAft>
+                <a:spcPts val="300"/>
+              </a:spcAft>
+              <a:buSzPct val="100000"/>
+              <a:buChar char="•"/>
+            </a:pPr>
+            <a:r>
+              <a:rPr lang="en-US" sz="1200" dirty="0">
+                <a:solidFill>
+                  <a:srgbClr val="1C2833"/>
+                </a:solidFill>
+                <a:latin typeface="Arial" pitchFamily="34" charset="0"/>
+                <a:ea typeface="Arial" pitchFamily="34" charset="-122"/>
+                <a:cs typeface="Arial" pitchFamily="34" charset="-120"/>
+              </a:rPr>
+              <a:t>Preview Day 3: "Now we'll add a </a:t>
+            </a:r>
+            <a:pPr algn="l" indent="0" marL="0">
+              <a:lnSpc>
+                <a:spcPts val="1620"/>
+              </a:lnSpc>
+              <a:spcAft>
+                <a:spcPts val="300"/>
+              </a:spcAft>
+              <a:buNone/>
+            </a:pPr>
+            <a:r>
+              <a:rPr lang="en-US" sz="1200" i="1" dirty="0">
+                <a:solidFill>
+                  <a:srgbClr val="1C2833"/>
+                </a:solidFill>
+                <a:latin typeface="Arial" pitchFamily="34" charset="0"/>
+                <a:ea typeface="Arial" pitchFamily="34" charset="-122"/>
+                <a:cs typeface="Arial" pitchFamily="34" charset="-120"/>
+              </a:rPr>
+              <a:t>single column</a:t>
+            </a:r>
+            <a:pPr algn="l" indent="0" marL="0">
+              <a:lnSpc>
+                <a:spcPts val="1620"/>
+              </a:lnSpc>
+              <a:spcAft>
+                <a:spcPts val="300"/>
+              </a:spcAft>
+              <a:buNone/>
+            </a:pPr>
+            <a:r>
+              <a:rPr lang="en-US" sz="1200" dirty="0">
+                <a:solidFill>
+                  <a:srgbClr val="1C2833"/>
+                </a:solidFill>
+                <a:latin typeface="Arial" pitchFamily="34" charset="0"/>
+                <a:ea typeface="Arial" pitchFamily="34" charset="-122"/>
+                <a:cs typeface="Arial" pitchFamily="34" charset="-120"/>
+              </a:rPr>
+              <a:t> of numbers using this."</a:t>
             </a:r>
             <a:endParaRPr lang="en-US" sz="1200" dirty="0"/>
           </a:p>
@@ -2814,6 +3200,1342 @@
                 <a:ea typeface="Georgia" pitchFamily="34" charset="-122"/>
                 <a:cs typeface="Georgia" pitchFamily="34" charset="-120"/>
               </a:rPr>
+              <a:t>Student-facing content</a:t>
+            </a:r>
+            <a:endParaRPr lang="en-US" sz="1800" dirty="0"/>
+          </a:p>
+        </p:txBody>
+      </p:sp>
+      <p:sp>
+        <p:nvSpPr>
+          <p:cNvPr id="4" name="Text 2"/>
+          <p:cNvSpPr/>
+          <p:nvPr/>
+        </p:nvSpPr>
+        <p:spPr>
+          <a:xfrm>
+            <a:off x="406301" y="883593"/>
+            <a:ext cx="8331398" cy="1938337"/>
+          </a:xfrm>
+          <a:prstGeom prst="rect">
+            <a:avLst/>
+          </a:prstGeom>
+          <a:solidFill>
+            <a:srgbClr val="F4F8F9"/>
+          </a:solidFill>
+          <a:ln/>
+        </p:spPr>
+        <p:txBody>
+          <a:bodyPr wrap="square" rtlCol="0" anchor="ctr"/>
+          <a:lstStyle/>
+          <a:p>
+            <a:pPr indent="0" marL="0">
+              <a:buNone/>
+            </a:pPr>
+            <a:endParaRPr lang="en-US" dirty="0"/>
+          </a:p>
+        </p:txBody>
+      </p:sp>
+      <p:sp>
+        <p:nvSpPr>
+          <p:cNvPr id="5" name="Shape 3"/>
+          <p:cNvSpPr/>
+          <p:nvPr/>
+        </p:nvSpPr>
+        <p:spPr>
+          <a:xfrm>
+            <a:off x="434876" y="883593"/>
+            <a:ext cx="0" cy="1938337"/>
+          </a:xfrm>
+          <a:prstGeom prst="line">
+            <a:avLst/>
+          </a:prstGeom>
+          <a:noFill/>
+          <a:ln w="57150">
+            <a:solidFill>
+              <a:srgbClr val="FE4447"/>
+            </a:solidFill>
+            <a:prstDash val="solid"/>
+          </a:ln>
+        </p:spPr>
+      </p:sp>
+      <p:sp>
+        <p:nvSpPr>
+          <p:cNvPr id="6" name="Text 4"/>
+          <p:cNvSpPr/>
+          <p:nvPr/>
+        </p:nvSpPr>
+        <p:spPr>
+          <a:xfrm>
+            <a:off x="692051" y="1074093"/>
+            <a:ext cx="7973389" cy="230981"/>
+          </a:xfrm>
+          <a:prstGeom prst="rect">
+            <a:avLst/>
+          </a:prstGeom>
+          <a:noFill/>
+          <a:ln/>
+        </p:spPr>
+        <p:txBody>
+          <a:bodyPr wrap="square" lIns="0" tIns="0" rIns="0" bIns="0" rtlCol="0" anchor="t"/>
+          <a:lstStyle/>
+          <a:p>
+            <a:pPr algn="l" indent="0" marL="0">
+              <a:lnSpc>
+                <a:spcPts val="1820"/>
+              </a:lnSpc>
+              <a:spcBef>
+                <a:spcPts val="300"/>
+              </a:spcBef>
+              <a:spcAft>
+                <a:spcPts val="300"/>
+              </a:spcAft>
+              <a:buNone/>
+            </a:pPr>
+            <a:r>
+              <a:rPr lang="en-US" sz="1300" b="1" i="1" dirty="0">
+                <a:solidFill>
+                  <a:srgbClr val="1C2833"/>
+                </a:solidFill>
+                <a:latin typeface="Georgia" pitchFamily="34" charset="0"/>
+                <a:ea typeface="Georgia" pitchFamily="34" charset="-122"/>
+                <a:cs typeface="Georgia" pitchFamily="34" charset="-120"/>
+              </a:rPr>
+              <a:t>The Five 10-Pairs</a:t>
+            </a:r>
+            <a:endParaRPr lang="en-US" sz="1300" dirty="0"/>
+          </a:p>
+        </p:txBody>
+      </p:sp>
+      <p:sp>
+        <p:nvSpPr>
+          <p:cNvPr id="7" name="Text 5"/>
+          <p:cNvSpPr/>
+          <p:nvPr/>
+        </p:nvSpPr>
+        <p:spPr>
+          <a:xfrm>
+            <a:off x="692051" y="1343174"/>
+            <a:ext cx="7973389" cy="230981"/>
+          </a:xfrm>
+          <a:prstGeom prst="rect">
+            <a:avLst/>
+          </a:prstGeom>
+          <a:noFill/>
+          <a:ln/>
+        </p:spPr>
+        <p:txBody>
+          <a:bodyPr wrap="square" lIns="0" tIns="0" rIns="0" bIns="0" rtlCol="0" anchor="t"/>
+          <a:lstStyle/>
+          <a:p>
+            <a:pPr algn="l" indent="0" marL="0">
+              <a:lnSpc>
+                <a:spcPts val="1820"/>
+              </a:lnSpc>
+              <a:spcBef>
+                <a:spcPts val="300"/>
+              </a:spcBef>
+              <a:spcAft>
+                <a:spcPts val="300"/>
+              </a:spcAft>
+              <a:buNone/>
+            </a:pPr>
+            <a:r>
+              <a:rPr lang="en-US" sz="1300" i="1" dirty="0">
+                <a:solidFill>
+                  <a:srgbClr val="1C2833"/>
+                </a:solidFill>
+                <a:latin typeface="Georgia" pitchFamily="34" charset="0"/>
+                <a:ea typeface="Georgia" pitchFamily="34" charset="-122"/>
+                <a:cs typeface="Georgia" pitchFamily="34" charset="-120"/>
+              </a:rPr>
+              <a:t>| 1 + 9 | 2 + 8 | 3 + 7 | 4 + 6 | 5 + 5 | |---|---|---|---|---|</a:t>
+            </a:r>
+            <a:endParaRPr lang="en-US" sz="1300" dirty="0"/>
+          </a:p>
+        </p:txBody>
+      </p:sp>
+      <p:sp>
+        <p:nvSpPr>
+          <p:cNvPr id="8" name="Text 6"/>
+          <p:cNvSpPr/>
+          <p:nvPr/>
+        </p:nvSpPr>
+        <p:spPr>
+          <a:xfrm>
+            <a:off x="692051" y="1612255"/>
+            <a:ext cx="7973389" cy="461963"/>
+          </a:xfrm>
+          <a:prstGeom prst="rect">
+            <a:avLst/>
+          </a:prstGeom>
+          <a:noFill/>
+          <a:ln/>
+        </p:spPr>
+        <p:txBody>
+          <a:bodyPr wrap="square" lIns="0" tIns="0" rIns="0" bIns="0" rtlCol="0" anchor="t"/>
+          <a:lstStyle/>
+          <a:p>
+            <a:pPr algn="l" indent="0" marL="0">
+              <a:lnSpc>
+                <a:spcPts val="1820"/>
+              </a:lnSpc>
+              <a:spcBef>
+                <a:spcPts val="300"/>
+              </a:spcBef>
+              <a:spcAft>
+                <a:spcPts val="300"/>
+              </a:spcAft>
+              <a:buNone/>
+            </a:pPr>
+            <a:r>
+              <a:rPr lang="en-US" sz="1300" dirty="0">
+                <a:solidFill>
+                  <a:srgbClr val="1C2833"/>
+                </a:solidFill>
+                <a:latin typeface="Georgia" pitchFamily="34" charset="0"/>
+                <a:ea typeface="Georgia" pitchFamily="34" charset="-122"/>
+                <a:cs typeface="Georgia" pitchFamily="34" charset="-120"/>
+              </a:rPr>
+              <a:t>Practice until you can name the partner of any single digit </a:t>
+            </a:r>
+            <a:pPr algn="l" indent="0" marL="0">
+              <a:lnSpc>
+                <a:spcPts val="1820"/>
+              </a:lnSpc>
+              <a:spcBef>
+                <a:spcPts val="300"/>
+              </a:spcBef>
+              <a:spcAft>
+                <a:spcPts val="300"/>
+              </a:spcAft>
+              <a:buNone/>
+            </a:pPr>
+            <a:r>
+              <a:rPr lang="en-US" sz="1300" i="1" dirty="0">
+                <a:solidFill>
+                  <a:srgbClr val="1C2833"/>
+                </a:solidFill>
+                <a:latin typeface="Georgia" pitchFamily="34" charset="0"/>
+                <a:ea typeface="Georgia" pitchFamily="34" charset="-122"/>
+                <a:cs typeface="Georgia" pitchFamily="34" charset="-120"/>
+              </a:rPr>
+              <a:t>instantly</a:t>
+            </a:r>
+            <a:pPr algn="l" indent="0" marL="0">
+              <a:lnSpc>
+                <a:spcPts val="1820"/>
+              </a:lnSpc>
+              <a:spcBef>
+                <a:spcPts val="300"/>
+              </a:spcBef>
+              <a:spcAft>
+                <a:spcPts val="300"/>
+              </a:spcAft>
+              <a:buNone/>
+            </a:pPr>
+            <a:r>
+              <a:rPr lang="en-US" sz="1300" dirty="0">
+                <a:solidFill>
+                  <a:srgbClr val="1C2833"/>
+                </a:solidFill>
+                <a:latin typeface="Georgia" pitchFamily="34" charset="0"/>
+                <a:ea typeface="Georgia" pitchFamily="34" charset="-122"/>
+                <a:cs typeface="Georgia" pitchFamily="34" charset="-120"/>
+              </a:rPr>
+              <a:t> — no thinking. This is the foundational skill of the dot method.</a:t>
+            </a:r>
+            <a:endParaRPr lang="en-US" sz="1300" dirty="0"/>
+          </a:p>
+        </p:txBody>
+      </p:sp>
+      <p:sp>
+        <p:nvSpPr>
+          <p:cNvPr id="9" name="Text 7"/>
+          <p:cNvSpPr/>
+          <p:nvPr/>
+        </p:nvSpPr>
+        <p:spPr>
+          <a:xfrm>
+            <a:off x="692051" y="2112318"/>
+            <a:ext cx="7973389" cy="230981"/>
+          </a:xfrm>
+          <a:prstGeom prst="rect">
+            <a:avLst/>
+          </a:prstGeom>
+          <a:noFill/>
+          <a:ln/>
+        </p:spPr>
+        <p:txBody>
+          <a:bodyPr wrap="square" lIns="0" tIns="0" rIns="0" bIns="0" rtlCol="0" anchor="t"/>
+          <a:lstStyle/>
+          <a:p>
+            <a:pPr algn="l" indent="0" marL="0">
+              <a:lnSpc>
+                <a:spcPts val="1820"/>
+              </a:lnSpc>
+              <a:spcBef>
+                <a:spcPts val="300"/>
+              </a:spcBef>
+              <a:spcAft>
+                <a:spcPts val="300"/>
+              </a:spcAft>
+              <a:buNone/>
+            </a:pPr>
+            <a:r>
+              <a:rPr lang="en-US" sz="1300" b="1" i="1" dirty="0">
+                <a:solidFill>
+                  <a:srgbClr val="1C2833"/>
+                </a:solidFill>
+                <a:latin typeface="Georgia" pitchFamily="34" charset="0"/>
+                <a:ea typeface="Georgia" pitchFamily="34" charset="-122"/>
+                <a:cs typeface="Georgia" pitchFamily="34" charset="-120"/>
+              </a:rPr>
+              <a:t>Drill:</a:t>
+            </a:r>
+            <a:pPr algn="l" indent="0" marL="0">
+              <a:lnSpc>
+                <a:spcPts val="1820"/>
+              </a:lnSpc>
+              <a:spcBef>
+                <a:spcPts val="300"/>
+              </a:spcBef>
+              <a:spcAft>
+                <a:spcPts val="300"/>
+              </a:spcAft>
+              <a:buNone/>
+            </a:pPr>
+            <a:r>
+              <a:rPr lang="en-US" sz="1300" dirty="0">
+                <a:solidFill>
+                  <a:srgbClr val="1C2833"/>
+                </a:solidFill>
+                <a:latin typeface="Georgia" pitchFamily="34" charset="0"/>
+                <a:ea typeface="Georgia" pitchFamily="34" charset="-122"/>
+                <a:cs typeface="Georgia" pitchFamily="34" charset="-120"/>
+              </a:rPr>
+              <a:t> in a row of 6–8 digits, scan and circle every 10-pair you can find. Write what's "left over."</a:t>
+            </a:r>
+            <a:endParaRPr lang="en-US" sz="1300" dirty="0"/>
+          </a:p>
+        </p:txBody>
+      </p:sp>
+      <p:sp>
+        <p:nvSpPr>
+          <p:cNvPr id="10" name="Text 8"/>
+          <p:cNvSpPr/>
+          <p:nvPr/>
+        </p:nvSpPr>
+        <p:spPr>
+          <a:xfrm>
+            <a:off x="692051" y="2381399"/>
+            <a:ext cx="7973389" cy="250031"/>
+          </a:xfrm>
+          <a:prstGeom prst="rect">
+            <a:avLst/>
+          </a:prstGeom>
+          <a:noFill/>
+          <a:ln/>
+        </p:spPr>
+        <p:txBody>
+          <a:bodyPr wrap="square" lIns="0" tIns="0" rIns="0" bIns="0" rtlCol="0" anchor="t"/>
+          <a:lstStyle/>
+          <a:p>
+            <a:pPr algn="l" indent="0" marL="0">
+              <a:lnSpc>
+                <a:spcPts val="1820"/>
+              </a:lnSpc>
+              <a:spcBef>
+                <a:spcPts val="300"/>
+              </a:spcBef>
+              <a:spcAft>
+                <a:spcPts val="300"/>
+              </a:spcAft>
+              <a:buNone/>
+            </a:pPr>
+            <a:r>
+              <a:rPr lang="en-US" sz="1300" dirty="0">
+                <a:solidFill>
+                  <a:srgbClr val="1C2833"/>
+                </a:solidFill>
+                <a:latin typeface="Georgia" pitchFamily="34" charset="0"/>
+                <a:ea typeface="Georgia" pitchFamily="34" charset="-122"/>
+                <a:cs typeface="Georgia" pitchFamily="34" charset="-120"/>
+              </a:rPr>
+              <a:t>Example: in </a:t>
+            </a:r>
+            <a:pPr algn="l" indent="0" marL="0">
+              <a:lnSpc>
+                <a:spcPts val="1820"/>
+              </a:lnSpc>
+              <a:spcBef>
+                <a:spcPts val="300"/>
+              </a:spcBef>
+              <a:spcAft>
+                <a:spcPts val="300"/>
+              </a:spcAft>
+              <a:buNone/>
+            </a:pPr>
+            <a:r>
+              <a:rPr lang="en-US" sz="1300" i="1" dirty="0">
+                <a:solidFill>
+                  <a:srgbClr val="1C2833"/>
+                </a:solidFill>
+                <a:latin typeface="Georgia" pitchFamily="34" charset="0"/>
+                <a:ea typeface="Georgia" pitchFamily="34" charset="-122"/>
+                <a:cs typeface="Georgia" pitchFamily="34" charset="-120"/>
+              </a:rPr>
+              <a:t>3 7 2 5 8 1 4 6</a:t>
+            </a:r>
+            <a:pPr algn="l" indent="0" marL="0">
+              <a:lnSpc>
+                <a:spcPts val="1820"/>
+              </a:lnSpc>
+              <a:spcBef>
+                <a:spcPts val="300"/>
+              </a:spcBef>
+              <a:spcAft>
+                <a:spcPts val="300"/>
+              </a:spcAft>
+              <a:buNone/>
+            </a:pPr>
+            <a:r>
+              <a:rPr lang="en-US" sz="1300" dirty="0">
+                <a:solidFill>
+                  <a:srgbClr val="1C2833"/>
+                </a:solidFill>
+                <a:latin typeface="Georgia" pitchFamily="34" charset="0"/>
+                <a:ea typeface="Georgia" pitchFamily="34" charset="-122"/>
+                <a:cs typeface="Georgia" pitchFamily="34" charset="-120"/>
+              </a:rPr>
+              <a:t>, you can find: 3+7, 2+8, 4+6 — three pairs, leftover is </a:t>
+            </a:r>
+            <a:pPr algn="l" indent="0" marL="0">
+              <a:lnSpc>
+                <a:spcPts val="1820"/>
+              </a:lnSpc>
+              <a:spcBef>
+                <a:spcPts val="300"/>
+              </a:spcBef>
+              <a:spcAft>
+                <a:spcPts val="300"/>
+              </a:spcAft>
+              <a:buNone/>
+            </a:pPr>
+            <a:r>
+              <a:rPr lang="en-US" sz="1300" i="1" dirty="0">
+                <a:solidFill>
+                  <a:srgbClr val="1C2833"/>
+                </a:solidFill>
+                <a:latin typeface="Georgia" pitchFamily="34" charset="0"/>
+                <a:ea typeface="Georgia" pitchFamily="34" charset="-122"/>
+                <a:cs typeface="Georgia" pitchFamily="34" charset="-120"/>
+              </a:rPr>
+              <a:t>5 1</a:t>
+            </a:r>
+            <a:pPr algn="l" indent="0" marL="0">
+              <a:lnSpc>
+                <a:spcPts val="1820"/>
+              </a:lnSpc>
+              <a:spcBef>
+                <a:spcPts val="300"/>
+              </a:spcBef>
+              <a:spcAft>
+                <a:spcPts val="300"/>
+              </a:spcAft>
+              <a:buNone/>
+            </a:pPr>
+            <a:r>
+              <a:rPr lang="en-US" sz="1300" dirty="0">
+                <a:solidFill>
+                  <a:srgbClr val="1C2833"/>
+                </a:solidFill>
+                <a:latin typeface="Georgia" pitchFamily="34" charset="0"/>
+                <a:ea typeface="Georgia" pitchFamily="34" charset="-122"/>
+                <a:cs typeface="Georgia" pitchFamily="34" charset="-120"/>
+              </a:rPr>
+              <a:t>.</a:t>
+            </a:r>
+            <a:endParaRPr lang="en-US" sz="1300" dirty="0"/>
+          </a:p>
+        </p:txBody>
+      </p:sp>
+      <p:sp>
+        <p:nvSpPr>
+          <p:cNvPr id="11" name="Text 9"/>
+          <p:cNvSpPr/>
+          <p:nvPr/>
+        </p:nvSpPr>
+        <p:spPr>
+          <a:xfrm>
+            <a:off x="406301" y="4434929"/>
+            <a:ext cx="8498026" cy="213271"/>
+          </a:xfrm>
+          <a:prstGeom prst="rect">
+            <a:avLst/>
+          </a:prstGeom>
+          <a:noFill/>
+          <a:ln/>
+        </p:spPr>
+        <p:txBody>
+          <a:bodyPr wrap="square" lIns="0" tIns="0" rIns="0" bIns="0" rtlCol="0" anchor="t"/>
+          <a:lstStyle/>
+          <a:p>
+            <a:pPr algn="l" indent="0" marL="0">
+              <a:lnSpc>
+                <a:spcPts val="1680"/>
+              </a:lnSpc>
+              <a:spcBef>
+                <a:spcPts val="300"/>
+              </a:spcBef>
+              <a:spcAft>
+                <a:spcPts val="300"/>
+              </a:spcAft>
+              <a:buNone/>
+            </a:pPr>
+            <a:r>
+              <a:rPr lang="en-US" sz="1200" dirty="0">
+                <a:solidFill>
+                  <a:srgbClr val="1C2833"/>
+                </a:solidFill>
+                <a:latin typeface="Arial" pitchFamily="34" charset="0"/>
+                <a:ea typeface="Arial" pitchFamily="34" charset="-122"/>
+                <a:cs typeface="Arial" pitchFamily="34" charset="-120"/>
+              </a:rPr>
+              <a:t>Middle ·  · IKS Curriculum</a:t>
+            </a:r>
+            <a:endParaRPr lang="en-US" sz="1200" dirty="0"/>
+          </a:p>
+        </p:txBody>
+      </p:sp>
+    </p:spTree>
+  </p:cSld>
+  <p:clrMapOvr>
+    <a:masterClrMapping/>
+  </p:clrMapOvr>
+</p:sld>
+</file>
+
+<file path=ppt/slides/slide13.xml><?xml version="1.0" encoding="utf-8"?>
+<p:sld xmlns:a="http://schemas.openxmlformats.org/drawingml/2006/main" xmlns:r="http://schemas.openxmlformats.org/officeDocument/2006/relationships" xmlns:p="http://schemas.openxmlformats.org/presentationml/2006/main">
+  <p:cSld name="Slide 13">
+    <p:bg>
+      <p:bgPr>
+        <a:solidFill>
+          <a:srgbClr val="FFFFFF"/>
+        </a:solidFill>
+      </p:bgPr>
+    </p:bg>
+    <p:spTree>
+      <p:nvGrpSpPr>
+        <p:cNvPr id="1" name=""/>
+        <p:cNvGrpSpPr/>
+        <p:nvPr/>
+      </p:nvGrpSpPr>
+      <p:grpSpPr>
+        <a:xfrm>
+          <a:off x="0" y="0"/>
+          <a:ext cx="0" cy="0"/>
+          <a:chOff x="0" y="0"/>
+          <a:chExt cx="0" cy="0"/>
+        </a:xfrm>
+      </p:grpSpPr>
+      <p:sp>
+        <p:nvSpPr>
+          <p:cNvPr id="2" name="Text 0"/>
+          <p:cNvSpPr/>
+          <p:nvPr/>
+        </p:nvSpPr>
+        <p:spPr>
+          <a:xfrm>
+            <a:off x="0" y="0"/>
+            <a:ext cx="9144000" cy="101501"/>
+          </a:xfrm>
+          <a:prstGeom prst="rect">
+            <a:avLst/>
+          </a:prstGeom>
+          <a:solidFill>
+            <a:srgbClr val="277884"/>
+          </a:solidFill>
+          <a:ln/>
+        </p:spPr>
+        <p:txBody>
+          <a:bodyPr wrap="square" rtlCol="0" anchor="ctr"/>
+          <a:lstStyle/>
+          <a:p>
+            <a:pPr indent="0" marL="0">
+              <a:buNone/>
+            </a:pPr>
+            <a:endParaRPr lang="en-US" dirty="0"/>
+          </a:p>
+        </p:txBody>
+      </p:sp>
+      <p:sp>
+        <p:nvSpPr>
+          <p:cNvPr id="3" name="Text 1"/>
+          <p:cNvSpPr/>
+          <p:nvPr/>
+        </p:nvSpPr>
+        <p:spPr>
+          <a:xfrm>
+            <a:off x="406301" y="457051"/>
+            <a:ext cx="8498026" cy="274290"/>
+          </a:xfrm>
+          <a:prstGeom prst="rect">
+            <a:avLst/>
+          </a:prstGeom>
+          <a:noFill/>
+          <a:ln/>
+        </p:spPr>
+        <p:txBody>
+          <a:bodyPr wrap="square" lIns="0" tIns="0" rIns="0" bIns="0" rtlCol="0" anchor="t"/>
+          <a:lstStyle/>
+          <a:p>
+            <a:pPr algn="l" indent="0" marL="0">
+              <a:lnSpc>
+                <a:spcPts val="2160"/>
+              </a:lnSpc>
+              <a:spcBef>
+                <a:spcPts val="600"/>
+              </a:spcBef>
+              <a:spcAft>
+                <a:spcPts val="800"/>
+              </a:spcAft>
+              <a:buNone/>
+            </a:pPr>
+            <a:r>
+              <a:rPr lang="en-US" sz="1800" b="1" dirty="0">
+                <a:solidFill>
+                  <a:srgbClr val="FE4447"/>
+                </a:solidFill>
+                <a:latin typeface="Georgia" pitchFamily="34" charset="0"/>
+                <a:ea typeface="Georgia" pitchFamily="34" charset="-122"/>
+                <a:cs typeface="Georgia" pitchFamily="34" charset="-120"/>
+              </a:rPr>
+              <a:t>Homework</a:t>
+            </a:r>
+            <a:endParaRPr lang="en-US" sz="1800" dirty="0"/>
+          </a:p>
+        </p:txBody>
+      </p:sp>
+      <p:sp>
+        <p:nvSpPr>
+          <p:cNvPr id="4" name="Text 2"/>
+          <p:cNvSpPr/>
+          <p:nvPr/>
+        </p:nvSpPr>
+        <p:spPr>
+          <a:xfrm>
+            <a:off x="634901" y="883593"/>
+            <a:ext cx="8102798" cy="731341"/>
+          </a:xfrm>
+          <a:prstGeom prst="rect">
+            <a:avLst/>
+          </a:prstGeom>
+          <a:noFill/>
+          <a:ln/>
+        </p:spPr>
+        <p:txBody>
+          <a:bodyPr wrap="square" lIns="0" tIns="0" rIns="0" bIns="0" rtlCol="0" anchor="t"/>
+          <a:lstStyle/>
+          <a:p>
+            <a:pPr algn="l" marL="342900" indent="-342900">
+              <a:lnSpc>
+                <a:spcPts val="1620"/>
+              </a:lnSpc>
+              <a:spcAft>
+                <a:spcPts val="300"/>
+              </a:spcAft>
+              <a:buSzPct val="100000"/>
+              <a:buChar char="•"/>
+            </a:pPr>
+            <a:r>
+              <a:rPr lang="en-US" sz="1200" dirty="0">
+                <a:solidFill>
+                  <a:srgbClr val="1C2833"/>
+                </a:solidFill>
+                <a:latin typeface="Arial" pitchFamily="34" charset="0"/>
+                <a:ea typeface="Arial" pitchFamily="34" charset="-122"/>
+                <a:cs typeface="Arial" pitchFamily="34" charset="-120"/>
+              </a:rPr>
+              <a:t>Practice the 10-pair recall. Have a parent or sibling call out single digits; you answer the partner. Beat 20 digits in 30 seconds.</a:t>
+            </a:r>
+            <a:endParaRPr lang="en-US" sz="1200" dirty="0"/>
+          </a:p>
+          <a:p>
+            <a:pPr algn="l" marL="342900" indent="-342900">
+              <a:lnSpc>
+                <a:spcPts val="1620"/>
+              </a:lnSpc>
+              <a:spcAft>
+                <a:spcPts val="300"/>
+              </a:spcAft>
+              <a:buSzPct val="100000"/>
+              <a:buChar char="•"/>
+            </a:pPr>
+            <a:r>
+              <a:rPr lang="en-US" sz="1200" dirty="0">
+                <a:solidFill>
+                  <a:srgbClr val="1C2833"/>
+                </a:solidFill>
+                <a:latin typeface="Arial" pitchFamily="34" charset="0"/>
+                <a:ea typeface="Arial" pitchFamily="34" charset="-122"/>
+                <a:cs typeface="Arial" pitchFamily="34" charset="-120"/>
+              </a:rPr>
+              <a:t>Continue: in any list of 6 digits, find all 10-pairs in under 10 sec.</a:t>
+            </a:r>
+            <a:endParaRPr lang="en-US" sz="1200" dirty="0"/>
+          </a:p>
+        </p:txBody>
+      </p:sp>
+      <p:sp>
+        <p:nvSpPr>
+          <p:cNvPr id="5" name="Text 3"/>
+          <p:cNvSpPr/>
+          <p:nvPr/>
+        </p:nvSpPr>
+        <p:spPr>
+          <a:xfrm>
+            <a:off x="406301" y="4434929"/>
+            <a:ext cx="8498026" cy="213271"/>
+          </a:xfrm>
+          <a:prstGeom prst="rect">
+            <a:avLst/>
+          </a:prstGeom>
+          <a:noFill/>
+          <a:ln/>
+        </p:spPr>
+        <p:txBody>
+          <a:bodyPr wrap="square" lIns="0" tIns="0" rIns="0" bIns="0" rtlCol="0" anchor="t"/>
+          <a:lstStyle/>
+          <a:p>
+            <a:pPr algn="l" indent="0" marL="0">
+              <a:lnSpc>
+                <a:spcPts val="1680"/>
+              </a:lnSpc>
+              <a:spcBef>
+                <a:spcPts val="300"/>
+              </a:spcBef>
+              <a:spcAft>
+                <a:spcPts val="300"/>
+              </a:spcAft>
+              <a:buNone/>
+            </a:pPr>
+            <a:r>
+              <a:rPr lang="en-US" sz="1200" dirty="0">
+                <a:solidFill>
+                  <a:srgbClr val="1C2833"/>
+                </a:solidFill>
+                <a:latin typeface="Arial" pitchFamily="34" charset="0"/>
+                <a:ea typeface="Arial" pitchFamily="34" charset="-122"/>
+                <a:cs typeface="Arial" pitchFamily="34" charset="-120"/>
+              </a:rPr>
+              <a:t>Middle ·  · IKS Curriculum</a:t>
+            </a:r>
+            <a:endParaRPr lang="en-US" sz="1200" dirty="0"/>
+          </a:p>
+        </p:txBody>
+      </p:sp>
+    </p:spTree>
+  </p:cSld>
+  <p:clrMapOvr>
+    <a:masterClrMapping/>
+  </p:clrMapOvr>
+</p:sld>
+</file>
+
+<file path=ppt/slides/slide14.xml><?xml version="1.0" encoding="utf-8"?>
+<p:sld xmlns:a="http://schemas.openxmlformats.org/drawingml/2006/main" xmlns:r="http://schemas.openxmlformats.org/officeDocument/2006/relationships" xmlns:p="http://schemas.openxmlformats.org/presentationml/2006/main">
+  <p:cSld name="Slide 14">
+    <p:bg>
+      <p:bgPr>
+        <a:solidFill>
+          <a:srgbClr val="FFFFFF"/>
+        </a:solidFill>
+      </p:bgPr>
+    </p:bg>
+    <p:spTree>
+      <p:nvGrpSpPr>
+        <p:cNvPr id="1" name=""/>
+        <p:cNvGrpSpPr/>
+        <p:nvPr/>
+      </p:nvGrpSpPr>
+      <p:grpSpPr>
+        <a:xfrm>
+          <a:off x="0" y="0"/>
+          <a:ext cx="0" cy="0"/>
+          <a:chOff x="0" y="0"/>
+          <a:chExt cx="0" cy="0"/>
+        </a:xfrm>
+      </p:grpSpPr>
+      <p:sp>
+        <p:nvSpPr>
+          <p:cNvPr id="2" name="Text 0"/>
+          <p:cNvSpPr/>
+          <p:nvPr/>
+        </p:nvSpPr>
+        <p:spPr>
+          <a:xfrm>
+            <a:off x="0" y="0"/>
+            <a:ext cx="9144000" cy="101501"/>
+          </a:xfrm>
+          <a:prstGeom prst="rect">
+            <a:avLst/>
+          </a:prstGeom>
+          <a:solidFill>
+            <a:srgbClr val="277884"/>
+          </a:solidFill>
+          <a:ln/>
+        </p:spPr>
+        <p:txBody>
+          <a:bodyPr wrap="square" rtlCol="0" anchor="ctr"/>
+          <a:lstStyle/>
+          <a:p>
+            <a:pPr indent="0" marL="0">
+              <a:buNone/>
+            </a:pPr>
+            <a:endParaRPr lang="en-US" dirty="0"/>
+          </a:p>
+        </p:txBody>
+      </p:sp>
+      <p:sp>
+        <p:nvSpPr>
+          <p:cNvPr id="3" name="Text 1"/>
+          <p:cNvSpPr/>
+          <p:nvPr/>
+        </p:nvSpPr>
+        <p:spPr>
+          <a:xfrm>
+            <a:off x="406301" y="457051"/>
+            <a:ext cx="8498026" cy="274290"/>
+          </a:xfrm>
+          <a:prstGeom prst="rect">
+            <a:avLst/>
+          </a:prstGeom>
+          <a:noFill/>
+          <a:ln/>
+        </p:spPr>
+        <p:txBody>
+          <a:bodyPr wrap="square" lIns="0" tIns="0" rIns="0" bIns="0" rtlCol="0" anchor="t"/>
+          <a:lstStyle/>
+          <a:p>
+            <a:pPr algn="l" indent="0" marL="0">
+              <a:lnSpc>
+                <a:spcPts val="2160"/>
+              </a:lnSpc>
+              <a:spcBef>
+                <a:spcPts val="600"/>
+              </a:spcBef>
+              <a:spcAft>
+                <a:spcPts val="800"/>
+              </a:spcAft>
+              <a:buNone/>
+            </a:pPr>
+            <a:r>
+              <a:rPr lang="en-US" sz="1800" b="1" dirty="0">
+                <a:solidFill>
+                  <a:srgbClr val="FE4447"/>
+                </a:solidFill>
+                <a:latin typeface="Georgia" pitchFamily="34" charset="0"/>
+                <a:ea typeface="Georgia" pitchFamily="34" charset="-122"/>
+                <a:cs typeface="Georgia" pitchFamily="34" charset="-120"/>
+              </a:rPr>
+              <a:t>Differentiation</a:t>
+            </a:r>
+            <a:endParaRPr lang="en-US" sz="1800" dirty="0"/>
+          </a:p>
+        </p:txBody>
+      </p:sp>
+      <p:sp>
+        <p:nvSpPr>
+          <p:cNvPr id="4" name="Text 2"/>
+          <p:cNvSpPr/>
+          <p:nvPr/>
+        </p:nvSpPr>
+        <p:spPr>
+          <a:xfrm>
+            <a:off x="634901" y="883593"/>
+            <a:ext cx="8102798" cy="525661"/>
+          </a:xfrm>
+          <a:prstGeom prst="rect">
+            <a:avLst/>
+          </a:prstGeom>
+          <a:noFill/>
+          <a:ln/>
+        </p:spPr>
+        <p:txBody>
+          <a:bodyPr wrap="square" lIns="0" tIns="0" rIns="0" bIns="0" rtlCol="0" anchor="t"/>
+          <a:lstStyle/>
+          <a:p>
+            <a:pPr algn="l" marL="342900" indent="-342900">
+              <a:lnSpc>
+                <a:spcPts val="1620"/>
+              </a:lnSpc>
+              <a:spcAft>
+                <a:spcPts val="300"/>
+              </a:spcAft>
+              <a:buSzPct val="100000"/>
+              <a:buChar char="•"/>
+            </a:pPr>
+            <a:r>
+              <a:rPr lang="en-US" sz="1200" b="1" dirty="0">
+                <a:solidFill>
+                  <a:srgbClr val="1C2833"/>
+                </a:solidFill>
+                <a:latin typeface="Arial" pitchFamily="34" charset="0"/>
+                <a:ea typeface="Arial" pitchFamily="34" charset="-122"/>
+                <a:cs typeface="Arial" pitchFamily="34" charset="-120"/>
+              </a:rPr>
+              <a:t>Tier up:</a:t>
+            </a:r>
+            <a:pPr algn="l" indent="0" marL="0">
+              <a:lnSpc>
+                <a:spcPts val="1620"/>
+              </a:lnSpc>
+              <a:spcAft>
+                <a:spcPts val="300"/>
+              </a:spcAft>
+              <a:buNone/>
+            </a:pPr>
+            <a:r>
+              <a:rPr lang="en-US" sz="1200" dirty="0">
+                <a:solidFill>
+                  <a:srgbClr val="1C2833"/>
+                </a:solidFill>
+                <a:latin typeface="Arial" pitchFamily="34" charset="0"/>
+                <a:ea typeface="Arial" pitchFamily="34" charset="-122"/>
+                <a:cs typeface="Arial" pitchFamily="34" charset="-120"/>
+              </a:rPr>
+              <a:t> Find pairs that sum to 9 OR 10 OR 11. (For future Day 7 — numbers near a base.)</a:t>
+            </a:r>
+            <a:endParaRPr lang="en-US" sz="1200" dirty="0"/>
+          </a:p>
+          <a:p>
+            <a:pPr algn="l" marL="342900" indent="-342900">
+              <a:lnSpc>
+                <a:spcPts val="1620"/>
+              </a:lnSpc>
+              <a:spcAft>
+                <a:spcPts val="300"/>
+              </a:spcAft>
+              <a:buSzPct val="100000"/>
+              <a:buChar char="•"/>
+            </a:pPr>
+            <a:r>
+              <a:rPr lang="en-US" sz="1200" b="1" dirty="0">
+                <a:solidFill>
+                  <a:srgbClr val="1C2833"/>
+                </a:solidFill>
+                <a:latin typeface="Arial" pitchFamily="34" charset="0"/>
+                <a:ea typeface="Arial" pitchFamily="34" charset="-122"/>
+                <a:cs typeface="Arial" pitchFamily="34" charset="-120"/>
+              </a:rPr>
+              <a:t>Tier down:</a:t>
+            </a:r>
+            <a:pPr algn="l" indent="0" marL="0">
+              <a:lnSpc>
+                <a:spcPts val="1620"/>
+              </a:lnSpc>
+              <a:spcAft>
+                <a:spcPts val="300"/>
+              </a:spcAft>
+              <a:buNone/>
+            </a:pPr>
+            <a:r>
+              <a:rPr lang="en-US" sz="1200" dirty="0">
+                <a:solidFill>
+                  <a:srgbClr val="1C2833"/>
+                </a:solidFill>
+                <a:latin typeface="Arial" pitchFamily="34" charset="0"/>
+                <a:ea typeface="Arial" pitchFamily="34" charset="-122"/>
+                <a:cs typeface="Arial" pitchFamily="34" charset="-120"/>
+              </a:rPr>
+              <a:t> Stick to recall-only practice today. The column work can wait one day.</a:t>
+            </a:r>
+            <a:endParaRPr lang="en-US" sz="1200" dirty="0"/>
+          </a:p>
+        </p:txBody>
+      </p:sp>
+      <p:sp>
+        <p:nvSpPr>
+          <p:cNvPr id="5" name="Text 3"/>
+          <p:cNvSpPr/>
+          <p:nvPr/>
+        </p:nvSpPr>
+        <p:spPr>
+          <a:xfrm>
+            <a:off x="406301" y="4434929"/>
+            <a:ext cx="8498026" cy="213271"/>
+          </a:xfrm>
+          <a:prstGeom prst="rect">
+            <a:avLst/>
+          </a:prstGeom>
+          <a:noFill/>
+          <a:ln/>
+        </p:spPr>
+        <p:txBody>
+          <a:bodyPr wrap="square" lIns="0" tIns="0" rIns="0" bIns="0" rtlCol="0" anchor="t"/>
+          <a:lstStyle/>
+          <a:p>
+            <a:pPr algn="l" indent="0" marL="0">
+              <a:lnSpc>
+                <a:spcPts val="1680"/>
+              </a:lnSpc>
+              <a:spcBef>
+                <a:spcPts val="300"/>
+              </a:spcBef>
+              <a:spcAft>
+                <a:spcPts val="300"/>
+              </a:spcAft>
+              <a:buNone/>
+            </a:pPr>
+            <a:r>
+              <a:rPr lang="en-US" sz="1200" dirty="0">
+                <a:solidFill>
+                  <a:srgbClr val="1C2833"/>
+                </a:solidFill>
+                <a:latin typeface="Arial" pitchFamily="34" charset="0"/>
+                <a:ea typeface="Arial" pitchFamily="34" charset="-122"/>
+                <a:cs typeface="Arial" pitchFamily="34" charset="-120"/>
+              </a:rPr>
+              <a:t>Middle ·  · IKS Curriculum</a:t>
+            </a:r>
+            <a:endParaRPr lang="en-US" sz="1200" dirty="0"/>
+          </a:p>
+        </p:txBody>
+      </p:sp>
+    </p:spTree>
+  </p:cSld>
+  <p:clrMapOvr>
+    <a:masterClrMapping/>
+  </p:clrMapOvr>
+</p:sld>
+</file>
+
+<file path=ppt/slides/slide15.xml><?xml version="1.0" encoding="utf-8"?>
+<p:sld xmlns:a="http://schemas.openxmlformats.org/drawingml/2006/main" xmlns:r="http://schemas.openxmlformats.org/officeDocument/2006/relationships" xmlns:p="http://schemas.openxmlformats.org/presentationml/2006/main">
+  <p:cSld name="Slide 15">
+    <p:bg>
+      <p:bgPr>
+        <a:solidFill>
+          <a:srgbClr val="FFFFFF"/>
+        </a:solidFill>
+      </p:bgPr>
+    </p:bg>
+    <p:spTree>
+      <p:nvGrpSpPr>
+        <p:cNvPr id="1" name=""/>
+        <p:cNvGrpSpPr/>
+        <p:nvPr/>
+      </p:nvGrpSpPr>
+      <p:grpSpPr>
+        <a:xfrm>
+          <a:off x="0" y="0"/>
+          <a:ext cx="0" cy="0"/>
+          <a:chOff x="0" y="0"/>
+          <a:chExt cx="0" cy="0"/>
+        </a:xfrm>
+      </p:grpSpPr>
+      <p:sp>
+        <p:nvSpPr>
+          <p:cNvPr id="2" name="Text 0"/>
+          <p:cNvSpPr/>
+          <p:nvPr/>
+        </p:nvSpPr>
+        <p:spPr>
+          <a:xfrm>
+            <a:off x="0" y="0"/>
+            <a:ext cx="9144000" cy="101501"/>
+          </a:xfrm>
+          <a:prstGeom prst="rect">
+            <a:avLst/>
+          </a:prstGeom>
+          <a:solidFill>
+            <a:srgbClr val="277884"/>
+          </a:solidFill>
+          <a:ln/>
+        </p:spPr>
+        <p:txBody>
+          <a:bodyPr wrap="square" rtlCol="0" anchor="ctr"/>
+          <a:lstStyle/>
+          <a:p>
+            <a:pPr indent="0" marL="0">
+              <a:buNone/>
+            </a:pPr>
+            <a:endParaRPr lang="en-US" dirty="0"/>
+          </a:p>
+        </p:txBody>
+      </p:sp>
+      <p:sp>
+        <p:nvSpPr>
+          <p:cNvPr id="3" name="Text 1"/>
+          <p:cNvSpPr/>
+          <p:nvPr/>
+        </p:nvSpPr>
+        <p:spPr>
+          <a:xfrm>
+            <a:off x="406301" y="457051"/>
+            <a:ext cx="8498026" cy="274290"/>
+          </a:xfrm>
+          <a:prstGeom prst="rect">
+            <a:avLst/>
+          </a:prstGeom>
+          <a:noFill/>
+          <a:ln/>
+        </p:spPr>
+        <p:txBody>
+          <a:bodyPr wrap="square" lIns="0" tIns="0" rIns="0" bIns="0" rtlCol="0" anchor="t"/>
+          <a:lstStyle/>
+          <a:p>
+            <a:pPr algn="l" indent="0" marL="0">
+              <a:lnSpc>
+                <a:spcPts val="2160"/>
+              </a:lnSpc>
+              <a:spcBef>
+                <a:spcPts val="600"/>
+              </a:spcBef>
+              <a:spcAft>
+                <a:spcPts val="800"/>
+              </a:spcAft>
+              <a:buNone/>
+            </a:pPr>
+            <a:r>
+              <a:rPr lang="en-US" sz="1800" b="1" dirty="0">
+                <a:solidFill>
+                  <a:srgbClr val="FE4447"/>
+                </a:solidFill>
+                <a:latin typeface="Georgia" pitchFamily="34" charset="0"/>
+                <a:ea typeface="Georgia" pitchFamily="34" charset="-122"/>
+                <a:cs typeface="Georgia" pitchFamily="34" charset="-120"/>
+              </a:rPr>
+              <a:t>Teacher notes</a:t>
+            </a:r>
+            <a:endParaRPr lang="en-US" sz="1800" dirty="0"/>
+          </a:p>
+        </p:txBody>
+      </p:sp>
+      <p:sp>
+        <p:nvSpPr>
+          <p:cNvPr id="4" name="Text 2"/>
+          <p:cNvSpPr/>
+          <p:nvPr/>
+        </p:nvSpPr>
+        <p:spPr>
+          <a:xfrm>
+            <a:off x="634901" y="883593"/>
+            <a:ext cx="8102798" cy="731341"/>
+          </a:xfrm>
+          <a:prstGeom prst="rect">
+            <a:avLst/>
+          </a:prstGeom>
+          <a:noFill/>
+          <a:ln/>
+        </p:spPr>
+        <p:txBody>
+          <a:bodyPr wrap="square" lIns="0" tIns="0" rIns="0" bIns="0" rtlCol="0" anchor="t"/>
+          <a:lstStyle/>
+          <a:p>
+            <a:pPr algn="l" marL="342900" indent="-342900">
+              <a:lnSpc>
+                <a:spcPts val="1620"/>
+              </a:lnSpc>
+              <a:spcAft>
+                <a:spcPts val="300"/>
+              </a:spcAft>
+              <a:buSzPct val="100000"/>
+              <a:buChar char="•"/>
+            </a:pPr>
+            <a:r>
+              <a:rPr lang="en-US" sz="1200" dirty="0">
+                <a:solidFill>
+                  <a:srgbClr val="1C2833"/>
+                </a:solidFill>
+                <a:latin typeface="Arial" pitchFamily="34" charset="0"/>
+                <a:ea typeface="Arial" pitchFamily="34" charset="-122"/>
+                <a:cs typeface="Arial" pitchFamily="34" charset="-120"/>
+              </a:rPr>
+              <a:t>This is the most important fluency lesson of the module. Do NOT skip the lightning round.</a:t>
+            </a:r>
+            <a:endParaRPr lang="en-US" sz="1200" dirty="0"/>
+          </a:p>
+          <a:p>
+            <a:pPr algn="l" marL="342900" indent="-342900">
+              <a:lnSpc>
+                <a:spcPts val="1620"/>
+              </a:lnSpc>
+              <a:spcAft>
+                <a:spcPts val="300"/>
+              </a:spcAft>
+              <a:buSzPct val="100000"/>
+              <a:buChar char="•"/>
+            </a:pPr>
+            <a:r>
+              <a:rPr lang="en-US" sz="1200" dirty="0">
+                <a:solidFill>
+                  <a:srgbClr val="1C2833"/>
+                </a:solidFill>
+                <a:latin typeface="Arial" pitchFamily="34" charset="0"/>
+                <a:ea typeface="Arial" pitchFamily="34" charset="-122"/>
+                <a:cs typeface="Arial" pitchFamily="34" charset="-120"/>
+              </a:rPr>
+              <a:t>If a student can't recall pairs by end of class, assign extra drill at home and provide a "pairs cheat sheet" for the rest of the module — withdraw it on Day 7.</a:t>
+            </a:r>
+            <a:endParaRPr lang="en-US" sz="1200" dirty="0"/>
+          </a:p>
+        </p:txBody>
+      </p:sp>
+      <p:sp>
+        <p:nvSpPr>
+          <p:cNvPr id="5" name="Text 3"/>
+          <p:cNvSpPr/>
+          <p:nvPr/>
+        </p:nvSpPr>
+        <p:spPr>
+          <a:xfrm>
+            <a:off x="406301" y="4434929"/>
+            <a:ext cx="8498026" cy="213271"/>
+          </a:xfrm>
+          <a:prstGeom prst="rect">
+            <a:avLst/>
+          </a:prstGeom>
+          <a:noFill/>
+          <a:ln/>
+        </p:spPr>
+        <p:txBody>
+          <a:bodyPr wrap="square" lIns="0" tIns="0" rIns="0" bIns="0" rtlCol="0" anchor="t"/>
+          <a:lstStyle/>
+          <a:p>
+            <a:pPr algn="l" indent="0" marL="0">
+              <a:lnSpc>
+                <a:spcPts val="1680"/>
+              </a:lnSpc>
+              <a:spcBef>
+                <a:spcPts val="300"/>
+              </a:spcBef>
+              <a:spcAft>
+                <a:spcPts val="300"/>
+              </a:spcAft>
+              <a:buNone/>
+            </a:pPr>
+            <a:r>
+              <a:rPr lang="en-US" sz="1200" dirty="0">
+                <a:solidFill>
+                  <a:srgbClr val="1C2833"/>
+                </a:solidFill>
+                <a:latin typeface="Arial" pitchFamily="34" charset="0"/>
+                <a:ea typeface="Arial" pitchFamily="34" charset="-122"/>
+                <a:cs typeface="Arial" pitchFamily="34" charset="-120"/>
+              </a:rPr>
+              <a:t>Middle ·  · IKS Curriculum</a:t>
+            </a:r>
+            <a:endParaRPr lang="en-US" sz="1200" dirty="0"/>
+          </a:p>
+        </p:txBody>
+      </p:sp>
+    </p:spTree>
+  </p:cSld>
+  <p:clrMapOvr>
+    <a:masterClrMapping/>
+  </p:clrMapOvr>
+</p:sld>
+</file>
+
+<file path=ppt/slides/slide16.xml><?xml version="1.0" encoding="utf-8"?>
+<p:sld xmlns:a="http://schemas.openxmlformats.org/drawingml/2006/main" xmlns:r="http://schemas.openxmlformats.org/officeDocument/2006/relationships" xmlns:p="http://schemas.openxmlformats.org/presentationml/2006/main">
+  <p:cSld name="Slide 16">
+    <p:bg>
+      <p:bgPr>
+        <a:solidFill>
+          <a:srgbClr val="FFFFFF"/>
+        </a:solidFill>
+      </p:bgPr>
+    </p:bg>
+    <p:spTree>
+      <p:nvGrpSpPr>
+        <p:cNvPr id="1" name=""/>
+        <p:cNvGrpSpPr/>
+        <p:nvPr/>
+      </p:nvGrpSpPr>
+      <p:grpSpPr>
+        <a:xfrm>
+          <a:off x="0" y="0"/>
+          <a:ext cx="0" cy="0"/>
+          <a:chOff x="0" y="0"/>
+          <a:chExt cx="0" cy="0"/>
+        </a:xfrm>
+      </p:grpSpPr>
+      <p:sp>
+        <p:nvSpPr>
+          <p:cNvPr id="2" name="Text 0"/>
+          <p:cNvSpPr/>
+          <p:nvPr/>
+        </p:nvSpPr>
+        <p:spPr>
+          <a:xfrm>
+            <a:off x="0" y="0"/>
+            <a:ext cx="9144000" cy="101501"/>
+          </a:xfrm>
+          <a:prstGeom prst="rect">
+            <a:avLst/>
+          </a:prstGeom>
+          <a:solidFill>
+            <a:srgbClr val="277884"/>
+          </a:solidFill>
+          <a:ln/>
+        </p:spPr>
+        <p:txBody>
+          <a:bodyPr wrap="square" rtlCol="0" anchor="ctr"/>
+          <a:lstStyle/>
+          <a:p>
+            <a:pPr indent="0" marL="0">
+              <a:buNone/>
+            </a:pPr>
+            <a:endParaRPr lang="en-US" dirty="0"/>
+          </a:p>
+        </p:txBody>
+      </p:sp>
+      <p:sp>
+        <p:nvSpPr>
+          <p:cNvPr id="3" name="Text 1"/>
+          <p:cNvSpPr/>
+          <p:nvPr/>
+        </p:nvSpPr>
+        <p:spPr>
+          <a:xfrm>
+            <a:off x="406301" y="457051"/>
+            <a:ext cx="8498026" cy="274290"/>
+          </a:xfrm>
+          <a:prstGeom prst="rect">
+            <a:avLst/>
+          </a:prstGeom>
+          <a:noFill/>
+          <a:ln/>
+        </p:spPr>
+        <p:txBody>
+          <a:bodyPr wrap="square" lIns="0" tIns="0" rIns="0" bIns="0" rtlCol="0" anchor="t"/>
+          <a:lstStyle/>
+          <a:p>
+            <a:pPr algn="l" indent="0" marL="0">
+              <a:lnSpc>
+                <a:spcPts val="2160"/>
+              </a:lnSpc>
+              <a:spcBef>
+                <a:spcPts val="600"/>
+              </a:spcBef>
+              <a:spcAft>
+                <a:spcPts val="800"/>
+              </a:spcAft>
+              <a:buNone/>
+            </a:pPr>
+            <a:r>
+              <a:rPr lang="en-US" sz="1800" b="1" dirty="0">
+                <a:solidFill>
+                  <a:srgbClr val="FE4447"/>
+                </a:solidFill>
+                <a:latin typeface="Georgia" pitchFamily="34" charset="0"/>
+                <a:ea typeface="Georgia" pitchFamily="34" charset="-122"/>
+                <a:cs typeface="Georgia" pitchFamily="34" charset="-120"/>
+              </a:rPr>
               <a:t>Citation(s) used in this lesson</a:t>
             </a:r>
             <a:endParaRPr lang="en-US" sz="1800" dirty="0"/>
@@ -3038,7 +4760,7 @@
                 <a:ea typeface="Georgia" pitchFamily="34" charset="-122"/>
                 <a:cs typeface="Georgia" pitchFamily="34" charset="-120"/>
               </a:rPr>
-              <a:t>Materials</a:t>
+              <a:t>Learning objective</a:t>
             </a:r>
             <a:endParaRPr lang="en-US" sz="1800" dirty="0"/>
           </a:p>
@@ -3086,7 +4808,7 @@
                 <a:ea typeface="Arial" pitchFamily="34" charset="-122"/>
                 <a:cs typeface="Arial" pitchFamily="34" charset="-120"/>
               </a:rPr>
-              <a:t>– A class wall-poster of the 5 pairs (1+9, 2+8, 3+7, 4+6, 5+5). Display before class. – Pre-printed pair-drill sheets (lists of 8 digits each — students circle 10-pairs). – Stopwatch per pair.</a:t>
+              <a:t>By the end of this lesson, students will instantly recall the 10-pair of any single digit (0+10, 1+9, 2+8, 3+7, 4+6, 5+5) AND identify all 10-pairs in a list of 6–8 single-digit numbers in under 10 seconds.</a:t>
             </a:r>
             <a:endParaRPr lang="en-US" sz="1200" dirty="0"/>
           </a:p>
@@ -3244,7 +4966,7 @@
                 <a:ea typeface="Georgia" pitchFamily="34" charset="-122"/>
                 <a:cs typeface="Georgia" pitchFamily="34" charset="-120"/>
               </a:rPr>
-              <a:t>Lesson flow</a:t>
+              <a:t>Materials</a:t>
             </a:r>
             <a:endParaRPr lang="en-US" sz="1800" dirty="0"/>
           </a:p>
@@ -3253,6 +4975,100 @@
       <p:sp>
         <p:nvSpPr>
           <p:cNvPr id="4" name="Text 2"/>
+          <p:cNvSpPr/>
+          <p:nvPr/>
+        </p:nvSpPr>
+        <p:spPr>
+          <a:xfrm>
+            <a:off x="634901" y="883593"/>
+            <a:ext cx="8102798" cy="769441"/>
+          </a:xfrm>
+          <a:prstGeom prst="rect">
+            <a:avLst/>
+          </a:prstGeom>
+          <a:noFill/>
+          <a:ln/>
+        </p:spPr>
+        <p:txBody>
+          <a:bodyPr wrap="square" lIns="0" tIns="0" rIns="0" bIns="0" rtlCol="0" anchor="t"/>
+          <a:lstStyle/>
+          <a:p>
+            <a:pPr algn="l" marL="342900" indent="-342900">
+              <a:lnSpc>
+                <a:spcPts val="1620"/>
+              </a:lnSpc>
+              <a:spcAft>
+                <a:spcPts val="300"/>
+              </a:spcAft>
+              <a:buSzPct val="100000"/>
+              <a:buChar char="•"/>
+            </a:pPr>
+            <a:r>
+              <a:rPr lang="en-US" sz="1200" dirty="0">
+                <a:solidFill>
+                  <a:srgbClr val="1C2833"/>
+                </a:solidFill>
+                <a:latin typeface="Arial" pitchFamily="34" charset="0"/>
+                <a:ea typeface="Arial" pitchFamily="34" charset="-122"/>
+                <a:cs typeface="Arial" pitchFamily="34" charset="-120"/>
+              </a:rPr>
+              <a:t>A class wall-poster of the 5 pairs (1+9, 2+8, 3+7, 4+6, 5+5). Display before class.</a:t>
+            </a:r>
+            <a:endParaRPr lang="en-US" sz="1200" dirty="0"/>
+          </a:p>
+          <a:p>
+            <a:pPr algn="l" marL="342900" indent="-342900">
+              <a:lnSpc>
+                <a:spcPts val="1620"/>
+              </a:lnSpc>
+              <a:spcAft>
+                <a:spcPts val="300"/>
+              </a:spcAft>
+              <a:buSzPct val="100000"/>
+              <a:buChar char="•"/>
+            </a:pPr>
+            <a:r>
+              <a:rPr lang="en-US" sz="1200" dirty="0">
+                <a:solidFill>
+                  <a:srgbClr val="1C2833"/>
+                </a:solidFill>
+                <a:latin typeface="Arial" pitchFamily="34" charset="0"/>
+                <a:ea typeface="Arial" pitchFamily="34" charset="-122"/>
+                <a:cs typeface="Arial" pitchFamily="34" charset="-120"/>
+              </a:rPr>
+              <a:t>Pre-printed pair-drill sheets (lists of 8 digits each — students circle 10-pairs).</a:t>
+            </a:r>
+            <a:endParaRPr lang="en-US" sz="1200" dirty="0"/>
+          </a:p>
+          <a:p>
+            <a:pPr algn="l" marL="342900" indent="-342900">
+              <a:lnSpc>
+                <a:spcPts val="1620"/>
+              </a:lnSpc>
+              <a:spcAft>
+                <a:spcPts val="300"/>
+              </a:spcAft>
+              <a:buSzPct val="100000"/>
+              <a:buChar char="•"/>
+            </a:pPr>
+            <a:r>
+              <a:rPr lang="en-US" sz="1200" dirty="0">
+                <a:solidFill>
+                  <a:srgbClr val="1C2833"/>
+                </a:solidFill>
+                <a:latin typeface="Arial" pitchFamily="34" charset="0"/>
+                <a:ea typeface="Arial" pitchFamily="34" charset="-122"/>
+                <a:cs typeface="Arial" pitchFamily="34" charset="-120"/>
+              </a:rPr>
+              <a:t>Stopwatch per pair.</a:t>
+            </a:r>
+            <a:endParaRPr lang="en-US" sz="1200" dirty="0"/>
+          </a:p>
+        </p:txBody>
+      </p:sp>
+      <p:sp>
+        <p:nvSpPr>
+          <p:cNvPr id="5" name="Text 3"/>
           <p:cNvSpPr/>
           <p:nvPr/>
         </p:nvSpPr>
@@ -3402,7 +5218,7 @@
                 <a:ea typeface="Georgia" pitchFamily="34" charset="-122"/>
                 <a:cs typeface="Georgia" pitchFamily="34" charset="-120"/>
               </a:rPr>
-              <a:t>Warm-up (5 min)</a:t>
+              <a:t>Lesson flow</a:t>
             </a:r>
             <a:endParaRPr lang="en-US" sz="1800" dirty="0"/>
           </a:p>
@@ -3411,120 +5227,6 @@
       <p:sp>
         <p:nvSpPr>
           <p:cNvPr id="4" name="Text 2"/>
-          <p:cNvSpPr/>
-          <p:nvPr/>
-        </p:nvSpPr>
-        <p:spPr>
-          <a:xfrm>
-            <a:off x="634901" y="883593"/>
-            <a:ext cx="8102798" cy="487561"/>
-          </a:xfrm>
-          <a:prstGeom prst="rect">
-            <a:avLst/>
-          </a:prstGeom>
-          <a:noFill/>
-          <a:ln/>
-        </p:spPr>
-        <p:txBody>
-          <a:bodyPr wrap="square" lIns="0" tIns="0" rIns="0" bIns="0" rtlCol="0" anchor="t"/>
-          <a:lstStyle/>
-          <a:p>
-            <a:pPr algn="l" marL="342900" indent="-342900">
-              <a:lnSpc>
-                <a:spcPts val="1620"/>
-              </a:lnSpc>
-              <a:spcAft>
-                <a:spcPts val="300"/>
-              </a:spcAft>
-              <a:buSzPct val="100000"/>
-              <a:buChar char="•"/>
-            </a:pPr>
-            <a:r>
-              <a:rPr lang="en-US" sz="1200" b="1" dirty="0">
-                <a:solidFill>
-                  <a:srgbClr val="1C2833"/>
-                </a:solidFill>
-                <a:latin typeface="Arial" pitchFamily="34" charset="0"/>
-                <a:ea typeface="Arial" pitchFamily="34" charset="-122"/>
-                <a:cs typeface="Arial" pitchFamily="34" charset="-120"/>
-              </a:rPr>
-              <a:t>Make-10 lightning round.</a:t>
-            </a:r>
-            <a:pPr algn="l" indent="0" marL="0">
-              <a:lnSpc>
-                <a:spcPts val="1620"/>
-              </a:lnSpc>
-              <a:spcAft>
-                <a:spcPts val="300"/>
-              </a:spcAft>
-              <a:buNone/>
-            </a:pPr>
-            <a:r>
-              <a:rPr lang="en-US" sz="1200" dirty="0">
-                <a:solidFill>
-                  <a:srgbClr val="1C2833"/>
-                </a:solidFill>
-                <a:latin typeface="Arial" pitchFamily="34" charset="0"/>
-                <a:ea typeface="Arial" pitchFamily="34" charset="-122"/>
-                <a:cs typeface="Arial" pitchFamily="34" charset="-120"/>
-              </a:rPr>
-              <a:t> Teacher calls 10 single digits in 30 seconds; students chorus the partner. (8 → 2. 3 → 7. 6 → 4. ...)</a:t>
-            </a:r>
-            <a:endParaRPr lang="en-US" sz="1200" dirty="0"/>
-          </a:p>
-        </p:txBody>
-      </p:sp>
-      <p:sp>
-        <p:nvSpPr>
-          <p:cNvPr id="5" name="Text 3"/>
-          <p:cNvSpPr/>
-          <p:nvPr/>
-        </p:nvSpPr>
-        <p:spPr>
-          <a:xfrm>
-            <a:off x="406301" y="1460004"/>
-            <a:ext cx="8498026" cy="213271"/>
-          </a:xfrm>
-          <a:prstGeom prst="rect">
-            <a:avLst/>
-          </a:prstGeom>
-          <a:noFill/>
-          <a:ln/>
-        </p:spPr>
-        <p:txBody>
-          <a:bodyPr wrap="square" lIns="0" tIns="0" rIns="0" bIns="0" rtlCol="0" anchor="t"/>
-          <a:lstStyle/>
-          <a:p>
-            <a:pPr algn="l" indent="0" marL="0">
-              <a:lnSpc>
-                <a:spcPts val="1680"/>
-              </a:lnSpc>
-              <a:spcBef>
-                <a:spcPts val="300"/>
-              </a:spcBef>
-              <a:spcAft>
-                <a:spcPts val="300"/>
-              </a:spcAft>
-              <a:buNone/>
-            </a:pPr>
-            <a:r>
-              <a:rPr lang="en-US" sz="1200" dirty="0">
-                <a:solidFill>
-                  <a:srgbClr val="1C2833"/>
-                </a:solidFill>
-                <a:latin typeface="Arial" pitchFamily="34" charset="0"/>
-                <a:ea typeface="Arial" pitchFamily="34" charset="-122"/>
-                <a:cs typeface="Arial" pitchFamily="34" charset="-120"/>
-              </a:rPr>
-              <a:t>– Repeat with a different sequence.</a:t>
-            </a:r>
-            <a:endParaRPr lang="en-US" sz="1200" dirty="0"/>
-          </a:p>
-        </p:txBody>
-      </p:sp>
-      <p:sp>
-        <p:nvSpPr>
-          <p:cNvPr id="6" name="Text 4"/>
           <p:cNvSpPr/>
           <p:nvPr/>
         </p:nvSpPr>
@@ -3674,7 +5376,7 @@
                 <a:ea typeface="Georgia" pitchFamily="34" charset="-122"/>
                 <a:cs typeface="Georgia" pitchFamily="34" charset="-120"/>
               </a:rPr>
-              <a:t>Core (15 min) — The 10-pair pattern</a:t>
+              <a:t>Warm-up (5 min)</a:t>
             </a:r>
             <a:endParaRPr lang="en-US" sz="1800" dirty="0"/>
           </a:p>
@@ -3689,7 +5391,7 @@
         <p:spPr>
           <a:xfrm>
             <a:off x="634901" y="883593"/>
-            <a:ext cx="8102798" cy="1424583"/>
+            <a:ext cx="8102798" cy="731341"/>
           </a:xfrm>
           <a:prstGeom prst="rect">
             <a:avLst/>
@@ -3720,7 +5422,7 @@
                 <a:ea typeface="Arial" pitchFamily="34" charset="-122"/>
                 <a:cs typeface="Arial" pitchFamily="34" charset="-120"/>
               </a:rPr>
-              <a:t>Reveal the wall poster.</a:t>
+              <a:t>Make-10 lightning round.</a:t>
             </a:r>
             <a:pPr algn="l" indent="0" marL="0">
               <a:lnSpc>
@@ -3740,7 +5442,7 @@
                 <a:ea typeface="Arial" pitchFamily="34" charset="-122"/>
                 <a:cs typeface="Arial" pitchFamily="34" charset="-120"/>
               </a:rPr>
-              <a:t> Walk through the 5 pairs.</a:t>
+              <a:t> Teacher calls 10 single digits in 30 seconds; students chorus the partner. (8 → 2. 3 → 7. 6 → 4. ...)</a:t>
             </a:r>
             <a:endParaRPr lang="en-US" sz="1200" dirty="0"/>
           </a:p>
@@ -3756,7 +5458,7 @@
               <a:buChar char="•"/>
             </a:pPr>
             <a:r>
-              <a:rPr lang="en-US" sz="1200" b="1" dirty="0">
+              <a:rPr lang="en-US" sz="1200" dirty="0">
                 <a:solidFill>
                   <a:srgbClr val="1C2833"/>
                 </a:solidFill>
@@ -3764,386 +5466,15 @@
                 <a:ea typeface="Arial" pitchFamily="34" charset="-122"/>
                 <a:cs typeface="Arial" pitchFamily="34" charset="-120"/>
               </a:rPr>
-              <a:t>Note (write on board):</a:t>
-            </a:r>
-            <a:pPr algn="l" indent="0" marL="0">
-              <a:lnSpc>
-                <a:spcPts val="1620"/>
-              </a:lnSpc>
-              <a:spcAft>
-                <a:spcPts val="300"/>
-              </a:spcAft>
-              <a:buNone/>
-            </a:pPr>
-            <a:r>
-              <a:rPr lang="en-US" sz="1200" dirty="0">
-                <a:solidFill>
-                  <a:srgbClr val="1C2833"/>
-                </a:solidFill>
-                <a:latin typeface="Arial" pitchFamily="34" charset="0"/>
-                <a:ea typeface="Arial" pitchFamily="34" charset="-122"/>
-                <a:cs typeface="Arial" pitchFamily="34" charset="-120"/>
-              </a:rPr>
-              <a:t> "Every single digit from 1–9 has exactly ONE partner that makes 10. Knowing all 5 pairs gives you the whole table."</a:t>
+              <a:t>Repeat with a different sequence.</a:t>
             </a:r>
             <a:endParaRPr lang="en-US" sz="1200" dirty="0"/>
           </a:p>
-          <a:p>
-            <a:pPr algn="l" marL="342900" indent="-342900">
-              <a:lnSpc>
-                <a:spcPts val="1620"/>
-              </a:lnSpc>
-              <a:spcAft>
-                <a:spcPts val="300"/>
-              </a:spcAft>
-              <a:buSzPct val="100000"/>
-              <a:buChar char="•"/>
-            </a:pPr>
-            <a:r>
-              <a:rPr lang="en-US" sz="1200" b="1" dirty="0">
-                <a:solidFill>
-                  <a:srgbClr val="1C2833"/>
-                </a:solidFill>
-                <a:latin typeface="Arial" pitchFamily="34" charset="0"/>
-                <a:ea typeface="Arial" pitchFamily="34" charset="-122"/>
-                <a:cs typeface="Arial" pitchFamily="34" charset="-120"/>
-              </a:rPr>
-              <a:t>Mental check:</a:t>
-            </a:r>
-            <a:pPr algn="l" indent="0" marL="0">
-              <a:lnSpc>
-                <a:spcPts val="1620"/>
-              </a:lnSpc>
-              <a:spcAft>
-                <a:spcPts val="300"/>
-              </a:spcAft>
-              <a:buNone/>
-            </a:pPr>
-            <a:r>
-              <a:rPr lang="en-US" sz="1200" dirty="0">
-                <a:solidFill>
-                  <a:srgbClr val="1C2833"/>
-                </a:solidFill>
-                <a:latin typeface="Arial" pitchFamily="34" charset="0"/>
-                <a:ea typeface="Arial" pitchFamily="34" charset="-122"/>
-                <a:cs typeface="Arial" pitchFamily="34" charset="-120"/>
-              </a:rPr>
-              <a:t> call out digits randomly for 60 seconds; class chorus the partner.</a:t>
-            </a:r>
-            <a:endParaRPr lang="en-US" sz="1200" dirty="0"/>
-          </a:p>
-          <a:p>
-            <a:pPr algn="l" marL="342900" indent="-342900">
-              <a:lnSpc>
-                <a:spcPts val="1620"/>
-              </a:lnSpc>
-              <a:spcAft>
-                <a:spcPts val="300"/>
-              </a:spcAft>
-              <a:buSzPct val="100000"/>
-              <a:buChar char="•"/>
-            </a:pPr>
-            <a:r>
-              <a:rPr lang="en-US" sz="1200" b="1" dirty="0">
-                <a:solidFill>
-                  <a:srgbClr val="1C2833"/>
-                </a:solidFill>
-                <a:latin typeface="Arial" pitchFamily="34" charset="0"/>
-                <a:ea typeface="Arial" pitchFamily="34" charset="-122"/>
-                <a:cs typeface="Arial" pitchFamily="34" charset="-120"/>
-              </a:rPr>
-              <a:t>The "extra" patterns:</a:t>
-            </a:r>
-            <a:pPr algn="l" indent="0" marL="0">
-              <a:lnSpc>
-                <a:spcPts val="1620"/>
-              </a:lnSpc>
-              <a:spcAft>
-                <a:spcPts val="300"/>
-              </a:spcAft>
-              <a:buNone/>
-            </a:pPr>
-            <a:r>
-              <a:rPr lang="en-US" sz="1200" dirty="0">
-                <a:solidFill>
-                  <a:srgbClr val="1C2833"/>
-                </a:solidFill>
-                <a:latin typeface="Arial" pitchFamily="34" charset="0"/>
-                <a:ea typeface="Arial" pitchFamily="34" charset="-122"/>
-                <a:cs typeface="Arial" pitchFamily="34" charset="-120"/>
-              </a:rPr>
-              <a:t> if the digit pair sums to 11 instead of 10, write down 1 and "the extra" goes into running total. If sum is 9 (no 10-pair available), just count.</a:t>
-            </a:r>
-            <a:endParaRPr lang="en-US" sz="1200" dirty="0"/>
-          </a:p>
         </p:txBody>
       </p:sp>
       <p:sp>
         <p:nvSpPr>
           <p:cNvPr id="5" name="Text 3"/>
-          <p:cNvSpPr/>
-          <p:nvPr/>
-        </p:nvSpPr>
-        <p:spPr>
-          <a:xfrm>
-            <a:off x="406301" y="2409676"/>
-            <a:ext cx="8331398" cy="1126778"/>
-          </a:xfrm>
-          <a:prstGeom prst="rect">
-            <a:avLst/>
-          </a:prstGeom>
-          <a:solidFill>
-            <a:srgbClr val="F4F8F9"/>
-          </a:solidFill>
-          <a:ln/>
-        </p:spPr>
-        <p:txBody>
-          <a:bodyPr wrap="square" rtlCol="0" anchor="ctr"/>
-          <a:lstStyle/>
-          <a:p>
-            <a:pPr indent="0" marL="0">
-              <a:buNone/>
-            </a:pPr>
-            <a:endParaRPr lang="en-US" dirty="0"/>
-          </a:p>
-        </p:txBody>
-      </p:sp>
-      <p:sp>
-        <p:nvSpPr>
-          <p:cNvPr id="6" name="Shape 4"/>
-          <p:cNvSpPr/>
-          <p:nvPr/>
-        </p:nvSpPr>
-        <p:spPr>
-          <a:xfrm>
-            <a:off x="430113" y="2409676"/>
-            <a:ext cx="0" cy="1126778"/>
-          </a:xfrm>
-          <a:prstGeom prst="line">
-            <a:avLst/>
-          </a:prstGeom>
-          <a:noFill/>
-          <a:ln w="47625">
-            <a:solidFill>
-              <a:srgbClr val="277884"/>
-            </a:solidFill>
-            <a:prstDash val="solid"/>
-          </a:ln>
-        </p:spPr>
-      </p:sp>
-      <p:sp>
-        <p:nvSpPr>
-          <p:cNvPr id="7" name="Text 5"/>
-          <p:cNvSpPr/>
-          <p:nvPr/>
-        </p:nvSpPr>
-        <p:spPr>
-          <a:xfrm>
-            <a:off x="631627" y="2536627"/>
-            <a:ext cx="8086939" cy="174575"/>
-          </a:xfrm>
-          <a:prstGeom prst="rect">
-            <a:avLst/>
-          </a:prstGeom>
-          <a:noFill/>
-          <a:ln/>
-        </p:spPr>
-        <p:txBody>
-          <a:bodyPr wrap="square" lIns="0" tIns="0" rIns="0" bIns="0" rtlCol="0" anchor="t"/>
-          <a:lstStyle/>
-          <a:p>
-            <a:pPr algn="l" indent="0" marL="0">
-              <a:lnSpc>
-                <a:spcPts val="1375"/>
-              </a:lnSpc>
-              <a:buNone/>
-            </a:pPr>
-            <a:r>
-              <a:rPr lang="en-US" sz="1100" dirty="0">
-                <a:solidFill>
-                  <a:srgbClr val="1C2833"/>
-                </a:solidFill>
-                <a:latin typeface="Courier New" pitchFamily="34" charset="0"/>
-                <a:ea typeface="Courier New" pitchFamily="34" charset="-122"/>
-                <a:cs typeface="Courier New" pitchFamily="34" charset="-120"/>
-              </a:rPr>
-              <a:t>Example column: 7, 5, 3, 8</a:t>
-            </a:r>
-            <a:endParaRPr lang="en-US" sz="1100" dirty="0"/>
-          </a:p>
-        </p:txBody>
-      </p:sp>
-      <p:sp>
-        <p:nvSpPr>
-          <p:cNvPr id="8" name="Text 6"/>
-          <p:cNvSpPr/>
-          <p:nvPr/>
-        </p:nvSpPr>
-        <p:spPr>
-          <a:xfrm>
-            <a:off x="631627" y="2711202"/>
-            <a:ext cx="8086939" cy="174575"/>
-          </a:xfrm>
-          <a:prstGeom prst="rect">
-            <a:avLst/>
-          </a:prstGeom>
-          <a:noFill/>
-          <a:ln/>
-        </p:spPr>
-        <p:txBody>
-          <a:bodyPr wrap="square" lIns="0" tIns="0" rIns="0" bIns="0" rtlCol="0" anchor="t"/>
-          <a:lstStyle/>
-          <a:p>
-            <a:pPr algn="l" indent="0" marL="0">
-              <a:lnSpc>
-                <a:spcPts val="1375"/>
-              </a:lnSpc>
-              <a:buNone/>
-            </a:pPr>
-            <a:r>
-              <a:rPr lang="en-US" sz="1100" dirty="0">
-                <a:solidFill>
-                  <a:srgbClr val="1C2833"/>
-                </a:solidFill>
-                <a:latin typeface="Courier New" pitchFamily="34" charset="0"/>
-                <a:ea typeface="Courier New" pitchFamily="34" charset="-122"/>
-                <a:cs typeface="Courier New" pitchFamily="34" charset="-120"/>
-              </a:rPr>
-              <a:t>– Scan: 7 + 3 = 10. Mark dot above 3. Running = 0.</a:t>
-            </a:r>
-            <a:endParaRPr lang="en-US" sz="1100" dirty="0"/>
-          </a:p>
-        </p:txBody>
-      </p:sp>
-      <p:sp>
-        <p:nvSpPr>
-          <p:cNvPr id="9" name="Text 7"/>
-          <p:cNvSpPr/>
-          <p:nvPr/>
-        </p:nvSpPr>
-        <p:spPr>
-          <a:xfrm>
-            <a:off x="631627" y="2885777"/>
-            <a:ext cx="8086939" cy="174575"/>
-          </a:xfrm>
-          <a:prstGeom prst="rect">
-            <a:avLst/>
-          </a:prstGeom>
-          <a:noFill/>
-          <a:ln/>
-        </p:spPr>
-        <p:txBody>
-          <a:bodyPr wrap="square" lIns="0" tIns="0" rIns="0" bIns="0" rtlCol="0" anchor="t"/>
-          <a:lstStyle/>
-          <a:p>
-            <a:pPr algn="l" indent="0" marL="0">
-              <a:lnSpc>
-                <a:spcPts val="1375"/>
-              </a:lnSpc>
-              <a:buNone/>
-            </a:pPr>
-            <a:r>
-              <a:rPr lang="en-US" sz="1100" dirty="0">
-                <a:solidFill>
-                  <a:srgbClr val="1C2833"/>
-                </a:solidFill>
-                <a:latin typeface="Courier New" pitchFamily="34" charset="0"/>
-                <a:ea typeface="Courier New" pitchFamily="34" charset="-122"/>
-                <a:cs typeface="Courier New" pitchFamily="34" charset="-120"/>
-              </a:rPr>
-              <a:t>– 5. Running = 5.</a:t>
-            </a:r>
-            <a:endParaRPr lang="en-US" sz="1100" dirty="0"/>
-          </a:p>
-        </p:txBody>
-      </p:sp>
-      <p:sp>
-        <p:nvSpPr>
-          <p:cNvPr id="10" name="Text 8"/>
-          <p:cNvSpPr/>
-          <p:nvPr/>
-        </p:nvSpPr>
-        <p:spPr>
-          <a:xfrm>
-            <a:off x="631627" y="3060353"/>
-            <a:ext cx="8086939" cy="174575"/>
-          </a:xfrm>
-          <a:prstGeom prst="rect">
-            <a:avLst/>
-          </a:prstGeom>
-          <a:noFill/>
-          <a:ln/>
-        </p:spPr>
-        <p:txBody>
-          <a:bodyPr wrap="square" lIns="0" tIns="0" rIns="0" bIns="0" rtlCol="0" anchor="t"/>
-          <a:lstStyle/>
-          <a:p>
-            <a:pPr algn="l" indent="0" marL="0">
-              <a:lnSpc>
-                <a:spcPts val="1375"/>
-              </a:lnSpc>
-              <a:buNone/>
-            </a:pPr>
-            <a:r>
-              <a:rPr lang="en-US" sz="1100" dirty="0">
-                <a:solidFill>
-                  <a:srgbClr val="1C2833"/>
-                </a:solidFill>
-                <a:latin typeface="Courier New" pitchFamily="34" charset="0"/>
-                <a:ea typeface="Courier New" pitchFamily="34" charset="-122"/>
-                <a:cs typeface="Courier New" pitchFamily="34" charset="-120"/>
-              </a:rPr>
-              <a:t>– 8. Running = 13 → 10-pair found (3 already used). Mark dot above 8. Running = 3.</a:t>
-            </a:r>
-            <a:endParaRPr lang="en-US" sz="1100" dirty="0"/>
-          </a:p>
-        </p:txBody>
-      </p:sp>
-      <p:sp>
-        <p:nvSpPr>
-          <p:cNvPr id="11" name="Text 9"/>
-          <p:cNvSpPr/>
-          <p:nvPr/>
-        </p:nvSpPr>
-        <p:spPr>
-          <a:xfrm>
-            <a:off x="631627" y="3234928"/>
-            <a:ext cx="8086939" cy="174575"/>
-          </a:xfrm>
-          <a:prstGeom prst="rect">
-            <a:avLst/>
-          </a:prstGeom>
-          <a:noFill/>
-          <a:ln/>
-        </p:spPr>
-        <p:txBody>
-          <a:bodyPr wrap="square" lIns="0" tIns="0" rIns="0" bIns="0" rtlCol="0" anchor="t"/>
-          <a:lstStyle/>
-          <a:p>
-            <a:pPr algn="l" indent="0" marL="0">
-              <a:lnSpc>
-                <a:spcPts val="1375"/>
-              </a:lnSpc>
-              <a:buNone/>
-            </a:pPr>
-            <a:r>
-              <a:rPr lang="en-US" sz="1100" dirty="0">
-                <a:solidFill>
-                  <a:srgbClr val="1C2833"/>
-                </a:solidFill>
-                <a:latin typeface="Courier New" pitchFamily="34" charset="0"/>
-                <a:ea typeface="Courier New" pitchFamily="34" charset="-122"/>
-                <a:cs typeface="Courier New" pitchFamily="34" charset="-120"/>
-              </a:rPr>
-              <a:t>– Write 3 under column. Carry 2 dots.</a:t>
-            </a:r>
-            <a:endParaRPr lang="en-US" sz="1100" dirty="0"/>
-          </a:p>
-        </p:txBody>
-      </p:sp>
-      <p:sp>
-        <p:nvSpPr>
-          <p:cNvPr id="12" name="Text 10"/>
           <p:cNvSpPr/>
           <p:nvPr/>
         </p:nvSpPr>
@@ -4293,7 +5624,7 @@
                 <a:ea typeface="Georgia" pitchFamily="34" charset="-122"/>
                 <a:cs typeface="Georgia" pitchFamily="34" charset="-120"/>
               </a:rPr>
-              <a:t>Activity (20 min) — Pair drills</a:t>
+              <a:t>Core (15 min) — The 10-pair pattern</a:t>
             </a:r>
             <a:endParaRPr lang="en-US" sz="1800" dirty="0"/>
           </a:p>
@@ -4307,8 +5638,8 @@
         </p:nvSpPr>
         <p:spPr>
           <a:xfrm>
-            <a:off x="406301" y="870942"/>
-            <a:ext cx="8498026" cy="426541"/>
+            <a:off x="634901" y="883593"/>
+            <a:ext cx="8102798" cy="1424583"/>
           </a:xfrm>
           <a:prstGeom prst="rect">
             <a:avLst/>
@@ -4320,20 +5651,18 @@
           <a:bodyPr wrap="square" lIns="0" tIns="0" rIns="0" bIns="0" rtlCol="0" anchor="t"/>
           <a:lstStyle/>
           <a:p>
-            <a:pPr algn="l" indent="0" marL="0">
-              <a:lnSpc>
-                <a:spcPts val="1680"/>
-              </a:lnSpc>
-              <a:spcBef>
-                <a:spcPts val="300"/>
-              </a:spcBef>
-              <a:spcAft>
-                <a:spcPts val="300"/>
-              </a:spcAft>
-              <a:buNone/>
-            </a:pPr>
-            <a:r>
-              <a:rPr lang="en-US" sz="1200" dirty="0">
+            <a:pPr algn="l" marL="342900" indent="-342900">
+              <a:lnSpc>
+                <a:spcPts val="1620"/>
+              </a:lnSpc>
+              <a:spcAft>
+                <a:spcPts val="300"/>
+              </a:spcAft>
+              <a:buSzPct val="100000"/>
+              <a:buChar char="•"/>
+            </a:pPr>
+            <a:r>
+              <a:rPr lang="en-US" sz="1200" b="1" dirty="0">
                 <a:solidFill>
                   <a:srgbClr val="1C2833"/>
                 </a:solidFill>
@@ -4341,40 +5670,12 @@
                 <a:ea typeface="Arial" pitchFamily="34" charset="-122"/>
                 <a:cs typeface="Arial" pitchFamily="34" charset="-120"/>
               </a:rPr>
-              <a:t>– Hand out drill sheets. Each sheet has 10 rows, each row a list of 6–8 digits. – Working in pairs:   – Partner A reads a row aloud.   – Partner B identifies all 10-pairs in the row in under 10 sec.   – Swap roles for the next row.</a:t>
-            </a:r>
-            <a:endParaRPr lang="en-US" sz="1200" dirty="0"/>
-          </a:p>
-        </p:txBody>
-      </p:sp>
-      <p:sp>
-        <p:nvSpPr>
-          <p:cNvPr id="5" name="Text 3"/>
-          <p:cNvSpPr/>
-          <p:nvPr/>
-        </p:nvSpPr>
-        <p:spPr>
-          <a:xfrm>
-            <a:off x="406301" y="1373684"/>
-            <a:ext cx="8498026" cy="213271"/>
-          </a:xfrm>
-          <a:prstGeom prst="rect">
-            <a:avLst/>
-          </a:prstGeom>
-          <a:noFill/>
-          <a:ln/>
-        </p:spPr>
-        <p:txBody>
-          <a:bodyPr wrap="square" lIns="0" tIns="0" rIns="0" bIns="0" rtlCol="0" anchor="t"/>
-          <a:lstStyle/>
-          <a:p>
-            <a:pPr algn="l" indent="0" marL="0">
-              <a:lnSpc>
-                <a:spcPts val="1680"/>
-              </a:lnSpc>
-              <a:spcBef>
-                <a:spcPts val="300"/>
-              </a:spcBef>
+              <a:t>Reveal the wall poster.</a:t>
+            </a:r>
+            <a:pPr algn="l" indent="0" marL="0">
+              <a:lnSpc>
+                <a:spcPts val="1620"/>
+              </a:lnSpc>
               <a:spcAft>
                 <a:spcPts val="300"/>
               </a:spcAft>
@@ -4389,310 +5690,23 @@
                 <a:ea typeface="Arial" pitchFamily="34" charset="-122"/>
                 <a:cs typeface="Arial" pitchFamily="34" charset="-120"/>
               </a:rPr>
-              <a:t>Suggested rows:</a:t>
+              <a:t> Walk through the 5 pairs.</a:t>
             </a:r>
             <a:endParaRPr lang="en-US" sz="1200" dirty="0"/>
           </a:p>
-        </p:txBody>
-      </p:sp>
-      <p:sp>
-        <p:nvSpPr>
-          <p:cNvPr id="6" name="Text 4"/>
-          <p:cNvSpPr/>
-          <p:nvPr/>
-        </p:nvSpPr>
-        <p:spPr>
-          <a:xfrm>
-            <a:off x="406301" y="1675805"/>
-            <a:ext cx="8331398" cy="1126778"/>
-          </a:xfrm>
-          <a:prstGeom prst="rect">
-            <a:avLst/>
-          </a:prstGeom>
-          <a:solidFill>
-            <a:srgbClr val="F4F8F9"/>
-          </a:solidFill>
-          <a:ln/>
-        </p:spPr>
-        <p:txBody>
-          <a:bodyPr wrap="square" rtlCol="0" anchor="ctr"/>
-          <a:lstStyle/>
-          <a:p>
-            <a:pPr indent="0" marL="0">
-              <a:buNone/>
-            </a:pPr>
-            <a:endParaRPr lang="en-US" dirty="0"/>
-          </a:p>
-        </p:txBody>
-      </p:sp>
-      <p:sp>
-        <p:nvSpPr>
-          <p:cNvPr id="7" name="Shape 5"/>
-          <p:cNvSpPr/>
-          <p:nvPr/>
-        </p:nvSpPr>
-        <p:spPr>
-          <a:xfrm>
-            <a:off x="430113" y="1675805"/>
-            <a:ext cx="0" cy="1126778"/>
-          </a:xfrm>
-          <a:prstGeom prst="line">
-            <a:avLst/>
-          </a:prstGeom>
-          <a:noFill/>
-          <a:ln w="47625">
-            <a:solidFill>
-              <a:srgbClr val="277884"/>
-            </a:solidFill>
-            <a:prstDash val="solid"/>
-          </a:ln>
-        </p:spPr>
-      </p:sp>
-      <p:sp>
-        <p:nvSpPr>
-          <p:cNvPr id="8" name="Text 6"/>
-          <p:cNvSpPr/>
-          <p:nvPr/>
-        </p:nvSpPr>
-        <p:spPr>
-          <a:xfrm>
-            <a:off x="631627" y="1802755"/>
-            <a:ext cx="8086939" cy="174575"/>
-          </a:xfrm>
-          <a:prstGeom prst="rect">
-            <a:avLst/>
-          </a:prstGeom>
-          <a:noFill/>
-          <a:ln/>
-        </p:spPr>
-        <p:txBody>
-          <a:bodyPr wrap="square" lIns="0" tIns="0" rIns="0" bIns="0" rtlCol="0" anchor="t"/>
-          <a:lstStyle/>
-          <a:p>
-            <a:pPr algn="l" indent="0" marL="0">
-              <a:lnSpc>
-                <a:spcPts val="1375"/>
-              </a:lnSpc>
-              <a:buNone/>
-            </a:pPr>
-            <a:r>
-              <a:rPr lang="en-US" sz="1100" dirty="0">
-                <a:solidFill>
-                  <a:srgbClr val="1C2833"/>
-                </a:solidFill>
-                <a:latin typeface="Courier New" pitchFamily="34" charset="0"/>
-                <a:ea typeface="Courier New" pitchFamily="34" charset="-122"/>
-                <a:cs typeface="Courier New" pitchFamily="34" charset="-120"/>
-              </a:rPr>
-              <a:t>Row 1: 3 7 2 5 8 1 4 6</a:t>
-            </a:r>
-            <a:endParaRPr lang="en-US" sz="1100" dirty="0"/>
-          </a:p>
-        </p:txBody>
-      </p:sp>
-      <p:sp>
-        <p:nvSpPr>
-          <p:cNvPr id="9" name="Text 7"/>
-          <p:cNvSpPr/>
-          <p:nvPr/>
-        </p:nvSpPr>
-        <p:spPr>
-          <a:xfrm>
-            <a:off x="631627" y="1977330"/>
-            <a:ext cx="8086939" cy="174575"/>
-          </a:xfrm>
-          <a:prstGeom prst="rect">
-            <a:avLst/>
-          </a:prstGeom>
-          <a:noFill/>
-          <a:ln/>
-        </p:spPr>
-        <p:txBody>
-          <a:bodyPr wrap="square" lIns="0" tIns="0" rIns="0" bIns="0" rtlCol="0" anchor="t"/>
-          <a:lstStyle/>
-          <a:p>
-            <a:pPr algn="l" indent="0" marL="0">
-              <a:lnSpc>
-                <a:spcPts val="1375"/>
-              </a:lnSpc>
-              <a:buNone/>
-            </a:pPr>
-            <a:r>
-              <a:rPr lang="en-US" sz="1100" dirty="0">
-                <a:solidFill>
-                  <a:srgbClr val="1C2833"/>
-                </a:solidFill>
-                <a:latin typeface="Courier New" pitchFamily="34" charset="0"/>
-                <a:ea typeface="Courier New" pitchFamily="34" charset="-122"/>
-                <a:cs typeface="Courier New" pitchFamily="34" charset="-120"/>
-              </a:rPr>
-              <a:t>Row 2: 9 4 1 2 8 5 3 7</a:t>
-            </a:r>
-            <a:endParaRPr lang="en-US" sz="1100" dirty="0"/>
-          </a:p>
-        </p:txBody>
-      </p:sp>
-      <p:sp>
-        <p:nvSpPr>
-          <p:cNvPr id="10" name="Text 8"/>
-          <p:cNvSpPr/>
-          <p:nvPr/>
-        </p:nvSpPr>
-        <p:spPr>
-          <a:xfrm>
-            <a:off x="631627" y="2151906"/>
-            <a:ext cx="8086939" cy="174575"/>
-          </a:xfrm>
-          <a:prstGeom prst="rect">
-            <a:avLst/>
-          </a:prstGeom>
-          <a:noFill/>
-          <a:ln/>
-        </p:spPr>
-        <p:txBody>
-          <a:bodyPr wrap="square" lIns="0" tIns="0" rIns="0" bIns="0" rtlCol="0" anchor="t"/>
-          <a:lstStyle/>
-          <a:p>
-            <a:pPr algn="l" indent="0" marL="0">
-              <a:lnSpc>
-                <a:spcPts val="1375"/>
-              </a:lnSpc>
-              <a:buNone/>
-            </a:pPr>
-            <a:r>
-              <a:rPr lang="en-US" sz="1100" dirty="0">
-                <a:solidFill>
-                  <a:srgbClr val="1C2833"/>
-                </a:solidFill>
-                <a:latin typeface="Courier New" pitchFamily="34" charset="0"/>
-                <a:ea typeface="Courier New" pitchFamily="34" charset="-122"/>
-                <a:cs typeface="Courier New" pitchFamily="34" charset="-120"/>
-              </a:rPr>
-              <a:t>Row 3: 5 5 6 4 1 9 2 8</a:t>
-            </a:r>
-            <a:endParaRPr lang="en-US" sz="1100" dirty="0"/>
-          </a:p>
-        </p:txBody>
-      </p:sp>
-      <p:sp>
-        <p:nvSpPr>
-          <p:cNvPr id="11" name="Text 9"/>
-          <p:cNvSpPr/>
-          <p:nvPr/>
-        </p:nvSpPr>
-        <p:spPr>
-          <a:xfrm>
-            <a:off x="631627" y="2326481"/>
-            <a:ext cx="8086939" cy="174575"/>
-          </a:xfrm>
-          <a:prstGeom prst="rect">
-            <a:avLst/>
-          </a:prstGeom>
-          <a:noFill/>
-          <a:ln/>
-        </p:spPr>
-        <p:txBody>
-          <a:bodyPr wrap="square" lIns="0" tIns="0" rIns="0" bIns="0" rtlCol="0" anchor="t"/>
-          <a:lstStyle/>
-          <a:p>
-            <a:pPr algn="l" indent="0" marL="0">
-              <a:lnSpc>
-                <a:spcPts val="1375"/>
-              </a:lnSpc>
-              <a:buNone/>
-            </a:pPr>
-            <a:r>
-              <a:rPr lang="en-US" sz="1100" dirty="0">
-                <a:solidFill>
-                  <a:srgbClr val="1C2833"/>
-                </a:solidFill>
-                <a:latin typeface="Courier New" pitchFamily="34" charset="0"/>
-                <a:ea typeface="Courier New" pitchFamily="34" charset="-122"/>
-                <a:cs typeface="Courier New" pitchFamily="34" charset="-120"/>
-              </a:rPr>
-              <a:t>Row 4: 7 3 6 1 9 8 2 4</a:t>
-            </a:r>
-            <a:endParaRPr lang="en-US" sz="1100" dirty="0"/>
-          </a:p>
-        </p:txBody>
-      </p:sp>
-      <p:sp>
-        <p:nvSpPr>
-          <p:cNvPr id="12" name="Text 10"/>
-          <p:cNvSpPr/>
-          <p:nvPr/>
-        </p:nvSpPr>
-        <p:spPr>
-          <a:xfrm>
-            <a:off x="631627" y="2501057"/>
-            <a:ext cx="8086939" cy="174575"/>
-          </a:xfrm>
-          <a:prstGeom prst="rect">
-            <a:avLst/>
-          </a:prstGeom>
-          <a:noFill/>
-          <a:ln/>
-        </p:spPr>
-        <p:txBody>
-          <a:bodyPr wrap="square" lIns="0" tIns="0" rIns="0" bIns="0" rtlCol="0" anchor="t"/>
-          <a:lstStyle/>
-          <a:p>
-            <a:pPr algn="l" indent="0" marL="0">
-              <a:lnSpc>
-                <a:spcPts val="1375"/>
-              </a:lnSpc>
-              <a:buNone/>
-            </a:pPr>
-            <a:r>
-              <a:rPr lang="en-US" sz="1100" dirty="0">
-                <a:solidFill>
-                  <a:srgbClr val="1C2833"/>
-                </a:solidFill>
-                <a:latin typeface="Courier New" pitchFamily="34" charset="0"/>
-                <a:ea typeface="Courier New" pitchFamily="34" charset="-122"/>
-                <a:cs typeface="Courier New" pitchFamily="34" charset="-120"/>
-              </a:rPr>
-              <a:t>...</a:t>
-            </a:r>
-            <a:endParaRPr lang="en-US" sz="1100" dirty="0"/>
-          </a:p>
-        </p:txBody>
-      </p:sp>
-      <p:sp>
-        <p:nvSpPr>
-          <p:cNvPr id="13" name="Text 11"/>
-          <p:cNvSpPr/>
-          <p:nvPr/>
-        </p:nvSpPr>
-        <p:spPr>
-          <a:xfrm>
-            <a:off x="406301" y="2891433"/>
-            <a:ext cx="8498026" cy="426541"/>
-          </a:xfrm>
-          <a:prstGeom prst="rect">
-            <a:avLst/>
-          </a:prstGeom>
-          <a:noFill/>
-          <a:ln/>
-        </p:spPr>
-        <p:txBody>
-          <a:bodyPr wrap="square" lIns="0" tIns="0" rIns="0" bIns="0" rtlCol="0" anchor="t"/>
-          <a:lstStyle/>
-          <a:p>
-            <a:pPr algn="l" indent="0" marL="0">
-              <a:lnSpc>
-                <a:spcPts val="1680"/>
-              </a:lnSpc>
-              <a:spcBef>
-                <a:spcPts val="300"/>
-              </a:spcBef>
-              <a:spcAft>
-                <a:spcPts val="300"/>
-              </a:spcAft>
-              <a:buNone/>
-            </a:pPr>
-            <a:r>
-              <a:rPr lang="en-US" sz="1200" dirty="0">
+          <a:p>
+            <a:pPr algn="l" marL="342900" indent="-342900">
+              <a:lnSpc>
+                <a:spcPts val="1620"/>
+              </a:lnSpc>
+              <a:spcAft>
+                <a:spcPts val="300"/>
+              </a:spcAft>
+              <a:buSzPct val="100000"/>
+              <a:buChar char="•"/>
+            </a:pPr>
+            <a:r>
+              <a:rPr lang="en-US" sz="1200" b="1" dirty="0">
                 <a:solidFill>
                   <a:srgbClr val="1C2833"/>
                 </a:solidFill>
@@ -4700,22 +5714,19 @@
                 <a:ea typeface="Arial" pitchFamily="34" charset="-122"/>
                 <a:cs typeface="Arial" pitchFamily="34" charset="-120"/>
               </a:rPr>
-              <a:t>After 5 minutes of paired drills, do a class-level </a:t>
-            </a:r>
-            <a:pPr algn="l" indent="0" marL="0">
-              <a:lnSpc>
-                <a:spcPts val="1680"/>
-              </a:lnSpc>
-              <a:spcBef>
-                <a:spcPts val="300"/>
-              </a:spcBef>
-              <a:spcAft>
-                <a:spcPts val="300"/>
-              </a:spcAft>
-              <a:buNone/>
-            </a:pPr>
-            <a:r>
-              <a:rPr lang="en-US" sz="1200" b="1" dirty="0">
+              <a:t>Note (write on board):</a:t>
+            </a:r>
+            <a:pPr algn="l" indent="0" marL="0">
+              <a:lnSpc>
+                <a:spcPts val="1620"/>
+              </a:lnSpc>
+              <a:spcAft>
+                <a:spcPts val="300"/>
+              </a:spcAft>
+              <a:buNone/>
+            </a:pPr>
+            <a:r>
+              <a:rPr lang="en-US" sz="1200" dirty="0">
                 <a:solidFill>
                   <a:srgbClr val="1C2833"/>
                 </a:solidFill>
@@ -4723,22 +5734,23 @@
                 <a:ea typeface="Arial" pitchFamily="34" charset="-122"/>
                 <a:cs typeface="Arial" pitchFamily="34" charset="-120"/>
               </a:rPr>
-              <a:t>timing test</a:t>
-            </a:r>
-            <a:pPr algn="l" indent="0" marL="0">
-              <a:lnSpc>
-                <a:spcPts val="1680"/>
-              </a:lnSpc>
-              <a:spcBef>
-                <a:spcPts val="300"/>
-              </a:spcBef>
-              <a:spcAft>
-                <a:spcPts val="300"/>
-              </a:spcAft>
-              <a:buNone/>
-            </a:pPr>
-            <a:r>
-              <a:rPr lang="en-US" sz="1200" dirty="0">
+              <a:t> "Every single digit from 1–9 has exactly ONE partner that makes 10. Knowing all 5 pairs gives you the whole table."</a:t>
+            </a:r>
+            <a:endParaRPr lang="en-US" sz="1200" dirty="0"/>
+          </a:p>
+          <a:p>
+            <a:pPr algn="l" marL="342900" indent="-342900">
+              <a:lnSpc>
+                <a:spcPts val="1620"/>
+              </a:lnSpc>
+              <a:spcAft>
+                <a:spcPts val="300"/>
+              </a:spcAft>
+              <a:buSzPct val="100000"/>
+              <a:buChar char="•"/>
+            </a:pPr>
+            <a:r>
+              <a:rPr lang="en-US" sz="1200" b="1" dirty="0">
                 <a:solidFill>
                   <a:srgbClr val="1C2833"/>
                 </a:solidFill>
@@ -4746,15 +5758,79 @@
                 <a:ea typeface="Arial" pitchFamily="34" charset="-122"/>
                 <a:cs typeface="Arial" pitchFamily="34" charset="-120"/>
               </a:rPr>
-              <a:t>: project a single row; students individually find all 10-pairs and write count + leftover. 20 seconds per row. Do 5 rows.</a:t>
+              <a:t>Mental check:</a:t>
+            </a:r>
+            <a:pPr algn="l" indent="0" marL="0">
+              <a:lnSpc>
+                <a:spcPts val="1620"/>
+              </a:lnSpc>
+              <a:spcAft>
+                <a:spcPts val="300"/>
+              </a:spcAft>
+              <a:buNone/>
+            </a:pPr>
+            <a:r>
+              <a:rPr lang="en-US" sz="1200" dirty="0">
+                <a:solidFill>
+                  <a:srgbClr val="1C2833"/>
+                </a:solidFill>
+                <a:latin typeface="Arial" pitchFamily="34" charset="0"/>
+                <a:ea typeface="Arial" pitchFamily="34" charset="-122"/>
+                <a:cs typeface="Arial" pitchFamily="34" charset="-120"/>
+              </a:rPr>
+              <a:t> call out digits randomly for 60 seconds; class chorus the partner.</a:t>
             </a:r>
             <a:endParaRPr lang="en-US" sz="1200" dirty="0"/>
           </a:p>
-        </p:txBody>
-      </p:sp>
-      <p:sp>
-        <p:nvSpPr>
-          <p:cNvPr id="14" name="Text 12"/>
+          <a:p>
+            <a:pPr algn="l" marL="342900" indent="-342900">
+              <a:lnSpc>
+                <a:spcPts val="1620"/>
+              </a:lnSpc>
+              <a:spcAft>
+                <a:spcPts val="300"/>
+              </a:spcAft>
+              <a:buSzPct val="100000"/>
+              <a:buChar char="•"/>
+            </a:pPr>
+            <a:r>
+              <a:rPr lang="en-US" sz="1200" b="1" dirty="0">
+                <a:solidFill>
+                  <a:srgbClr val="1C2833"/>
+                </a:solidFill>
+                <a:latin typeface="Arial" pitchFamily="34" charset="0"/>
+                <a:ea typeface="Arial" pitchFamily="34" charset="-122"/>
+                <a:cs typeface="Arial" pitchFamily="34" charset="-120"/>
+              </a:rPr>
+              <a:t>The "extra" patterns:</a:t>
+            </a:r>
+            <a:pPr algn="l" indent="0" marL="0">
+              <a:lnSpc>
+                <a:spcPts val="1620"/>
+              </a:lnSpc>
+              <a:spcAft>
+                <a:spcPts val="300"/>
+              </a:spcAft>
+              <a:buNone/>
+            </a:pPr>
+            <a:r>
+              <a:rPr lang="en-US" sz="1200" dirty="0">
+                <a:solidFill>
+                  <a:srgbClr val="1C2833"/>
+                </a:solidFill>
+                <a:latin typeface="Arial" pitchFamily="34" charset="0"/>
+                <a:ea typeface="Arial" pitchFamily="34" charset="-122"/>
+                <a:cs typeface="Arial" pitchFamily="34" charset="-120"/>
+              </a:rPr>
+              <a:t> if the digit pair sums to 11 instead of 10, write down 1 and "the extra" goes into running total. If sum is 9 (no 10-pair available), just count.</a:t>
+            </a:r>
+            <a:endParaRPr lang="en-US" sz="1200" dirty="0"/>
+          </a:p>
+        </p:txBody>
+      </p:sp>
+      <p:sp>
+        <p:nvSpPr>
+          <p:cNvPr id="5" name="Text 3"/>
           <p:cNvSpPr/>
           <p:nvPr/>
         </p:nvSpPr>
@@ -4904,7 +5980,7 @@
                 <a:ea typeface="Georgia" pitchFamily="34" charset="-122"/>
                 <a:cs typeface="Georgia" pitchFamily="34" charset="-120"/>
               </a:rPr>
-              <a:t>Wrap-up (5 min)</a:t>
+              <a:t>Core (15 min) — The 10-pair pattern (cont.)</a:t>
             </a:r>
             <a:endParaRPr lang="en-US" sz="1800" dirty="0"/>
           </a:p>
@@ -4918,13 +5994,66 @@
         </p:nvSpPr>
         <p:spPr>
           <a:xfrm>
-            <a:off x="406301" y="870942"/>
-            <a:ext cx="8498026" cy="426541"/>
-          </a:xfrm>
-          <a:prstGeom prst="rect">
+            <a:off x="406301" y="883593"/>
+            <a:ext cx="8331398" cy="1126778"/>
+          </a:xfrm>
+          <a:prstGeom prst="rect">
+            <a:avLst/>
+          </a:prstGeom>
+          <a:solidFill>
+            <a:srgbClr val="F4F8F9"/>
+          </a:solidFill>
+          <a:ln/>
+        </p:spPr>
+        <p:txBody>
+          <a:bodyPr wrap="square" rtlCol="0" anchor="ctr"/>
+          <a:lstStyle/>
+          <a:p>
+            <a:pPr indent="0" marL="0">
+              <a:buNone/>
+            </a:pPr>
+            <a:endParaRPr lang="en-US" dirty="0"/>
+          </a:p>
+        </p:txBody>
+      </p:sp>
+      <p:sp>
+        <p:nvSpPr>
+          <p:cNvPr id="5" name="Shape 3"/>
+          <p:cNvSpPr/>
+          <p:nvPr/>
+        </p:nvSpPr>
+        <p:spPr>
+          <a:xfrm>
+            <a:off x="430113" y="883593"/>
+            <a:ext cx="0" cy="1126778"/>
+          </a:xfrm>
+          <a:prstGeom prst="line">
             <a:avLst/>
           </a:prstGeom>
           <a:noFill/>
+          <a:ln w="47625">
+            <a:solidFill>
+              <a:srgbClr val="277884"/>
+            </a:solidFill>
+            <a:prstDash val="solid"/>
+          </a:ln>
+        </p:spPr>
+      </p:sp>
+      <p:sp>
+        <p:nvSpPr>
+          <p:cNvPr id="6" name="Text 4"/>
+          <p:cNvSpPr/>
+          <p:nvPr/>
+        </p:nvSpPr>
+        <p:spPr>
+          <a:xfrm>
+            <a:off x="631627" y="1010543"/>
+            <a:ext cx="8086939" cy="174575"/>
+          </a:xfrm>
+          <a:prstGeom prst="rect">
+            <a:avLst/>
+          </a:prstGeom>
+          <a:noFill/>
           <a:ln/>
         </p:spPr>
         <p:txBody>
@@ -4933,172 +6062,196 @@
           <a:p>
             <a:pPr algn="l" indent="0" marL="0">
               <a:lnSpc>
-                <a:spcPts val="1680"/>
-              </a:lnSpc>
-              <a:spcBef>
-                <a:spcPts val="300"/>
-              </a:spcBef>
-              <a:spcAft>
-                <a:spcPts val="300"/>
-              </a:spcAft>
-              <a:buNone/>
-            </a:pPr>
-            <a:r>
-              <a:rPr lang="en-US" sz="1200" dirty="0">
-                <a:solidFill>
-                  <a:srgbClr val="1C2833"/>
-                </a:solidFill>
-                <a:latin typeface="Arial" pitchFamily="34" charset="0"/>
-                <a:ea typeface="Arial" pitchFamily="34" charset="-122"/>
-                <a:cs typeface="Arial" pitchFamily="34" charset="-120"/>
-              </a:rPr>
-              <a:t>– Quick check: </a:t>
-            </a:r>
-            <a:pPr algn="l" indent="0" marL="0">
-              <a:lnSpc>
-                <a:spcPts val="1680"/>
-              </a:lnSpc>
-              <a:spcBef>
-                <a:spcPts val="300"/>
-              </a:spcBef>
-              <a:spcAft>
-                <a:spcPts val="300"/>
-              </a:spcAft>
-              <a:buNone/>
-            </a:pPr>
-            <a:r>
-              <a:rPr lang="en-US" sz="1200" i="1" dirty="0">
-                <a:solidFill>
-                  <a:srgbClr val="1C2833"/>
-                </a:solidFill>
-                <a:latin typeface="Arial" pitchFamily="34" charset="0"/>
-                <a:ea typeface="Arial" pitchFamily="34" charset="-122"/>
-                <a:cs typeface="Arial" pitchFamily="34" charset="-120"/>
-              </a:rPr>
-              <a:t>"Without thinking, what makes 10 with: 6?"</a:t>
-            </a:r>
-            <a:pPr algn="l" indent="0" marL="0">
-              <a:lnSpc>
-                <a:spcPts val="1680"/>
-              </a:lnSpc>
-              <a:spcBef>
-                <a:spcPts val="300"/>
-              </a:spcBef>
-              <a:spcAft>
-                <a:spcPts val="300"/>
-              </a:spcAft>
-              <a:buNone/>
-            </a:pPr>
-            <a:r>
-              <a:rPr lang="en-US" sz="1200" dirty="0">
-                <a:solidFill>
-                  <a:srgbClr val="1C2833"/>
-                </a:solidFill>
-                <a:latin typeface="Arial" pitchFamily="34" charset="0"/>
-                <a:ea typeface="Arial" pitchFamily="34" charset="-122"/>
-                <a:cs typeface="Arial" pitchFamily="34" charset="-120"/>
-              </a:rPr>
-              <a:t> (chorus 4). </a:t>
-            </a:r>
-            <a:pPr algn="l" indent="0" marL="0">
-              <a:lnSpc>
-                <a:spcPts val="1680"/>
-              </a:lnSpc>
-              <a:spcBef>
-                <a:spcPts val="300"/>
-              </a:spcBef>
-              <a:spcAft>
-                <a:spcPts val="300"/>
-              </a:spcAft>
-              <a:buNone/>
-            </a:pPr>
-            <a:r>
-              <a:rPr lang="en-US" sz="1200" i="1" dirty="0">
-                <a:solidFill>
-                  <a:srgbClr val="1C2833"/>
-                </a:solidFill>
-                <a:latin typeface="Arial" pitchFamily="34" charset="0"/>
-                <a:ea typeface="Arial" pitchFamily="34" charset="-122"/>
-                <a:cs typeface="Arial" pitchFamily="34" charset="-120"/>
-              </a:rPr>
-              <a:t>"With 8?"</a:t>
-            </a:r>
-            <a:pPr algn="l" indent="0" marL="0">
-              <a:lnSpc>
-                <a:spcPts val="1680"/>
-              </a:lnSpc>
-              <a:spcBef>
-                <a:spcPts val="300"/>
-              </a:spcBef>
-              <a:spcAft>
-                <a:spcPts val="300"/>
-              </a:spcAft>
-              <a:buNone/>
-            </a:pPr>
-            <a:r>
-              <a:rPr lang="en-US" sz="1200" dirty="0">
-                <a:solidFill>
-                  <a:srgbClr val="1C2833"/>
-                </a:solidFill>
-                <a:latin typeface="Arial" pitchFamily="34" charset="0"/>
-                <a:ea typeface="Arial" pitchFamily="34" charset="-122"/>
-                <a:cs typeface="Arial" pitchFamily="34" charset="-120"/>
-              </a:rPr>
-              <a:t> (chorus 2). – Preview Day 3: "Now we'll add a </a:t>
-            </a:r>
-            <a:pPr algn="l" indent="0" marL="0">
-              <a:lnSpc>
-                <a:spcPts val="1680"/>
-              </a:lnSpc>
-              <a:spcBef>
-                <a:spcPts val="300"/>
-              </a:spcBef>
-              <a:spcAft>
-                <a:spcPts val="300"/>
-              </a:spcAft>
-              <a:buNone/>
-            </a:pPr>
-            <a:r>
-              <a:rPr lang="en-US" sz="1200" i="1" dirty="0">
-                <a:solidFill>
-                  <a:srgbClr val="1C2833"/>
-                </a:solidFill>
-                <a:latin typeface="Arial" pitchFamily="34" charset="0"/>
-                <a:ea typeface="Arial" pitchFamily="34" charset="-122"/>
-                <a:cs typeface="Arial" pitchFamily="34" charset="-120"/>
-              </a:rPr>
-              <a:t>single column</a:t>
-            </a:r>
-            <a:pPr algn="l" indent="0" marL="0">
-              <a:lnSpc>
-                <a:spcPts val="1680"/>
-              </a:lnSpc>
-              <a:spcBef>
-                <a:spcPts val="300"/>
-              </a:spcBef>
-              <a:spcAft>
-                <a:spcPts val="300"/>
-              </a:spcAft>
-              <a:buNone/>
-            </a:pPr>
-            <a:r>
-              <a:rPr lang="en-US" sz="1200" dirty="0">
-                <a:solidFill>
-                  <a:srgbClr val="1C2833"/>
-                </a:solidFill>
-                <a:latin typeface="Arial" pitchFamily="34" charset="0"/>
-                <a:ea typeface="Arial" pitchFamily="34" charset="-122"/>
-                <a:cs typeface="Arial" pitchFamily="34" charset="-120"/>
-              </a:rPr>
-              <a:t> of numbers using this."</a:t>
-            </a:r>
-            <a:endParaRPr lang="en-US" sz="1200" dirty="0"/>
-          </a:p>
-        </p:txBody>
-      </p:sp>
-      <p:sp>
-        <p:nvSpPr>
-          <p:cNvPr id="5" name="Text 3"/>
+                <a:spcPts val="1375"/>
+              </a:lnSpc>
+              <a:buNone/>
+            </a:pPr>
+            <a:r>
+              <a:rPr lang="en-US" sz="1100" dirty="0">
+                <a:solidFill>
+                  <a:srgbClr val="1C2833"/>
+                </a:solidFill>
+                <a:latin typeface="Courier New" pitchFamily="34" charset="0"/>
+                <a:ea typeface="Courier New" pitchFamily="34" charset="-122"/>
+                <a:cs typeface="Courier New" pitchFamily="34" charset="-120"/>
+              </a:rPr>
+              <a:t>Example column: 7, 5, 3, 8</a:t>
+            </a:r>
+            <a:endParaRPr lang="en-US" sz="1100" dirty="0"/>
+          </a:p>
+        </p:txBody>
+      </p:sp>
+      <p:sp>
+        <p:nvSpPr>
+          <p:cNvPr id="7" name="Text 5"/>
+          <p:cNvSpPr/>
+          <p:nvPr/>
+        </p:nvSpPr>
+        <p:spPr>
+          <a:xfrm>
+            <a:off x="631627" y="1185118"/>
+            <a:ext cx="8086939" cy="174575"/>
+          </a:xfrm>
+          <a:prstGeom prst="rect">
+            <a:avLst/>
+          </a:prstGeom>
+          <a:noFill/>
+          <a:ln/>
+        </p:spPr>
+        <p:txBody>
+          <a:bodyPr wrap="square" lIns="0" tIns="0" rIns="0" bIns="0" rtlCol="0" anchor="t"/>
+          <a:lstStyle/>
+          <a:p>
+            <a:pPr algn="l" indent="0" marL="0">
+              <a:lnSpc>
+                <a:spcPts val="1375"/>
+              </a:lnSpc>
+              <a:buNone/>
+            </a:pPr>
+            <a:r>
+              <a:rPr lang="en-US" sz="1100" dirty="0">
+                <a:solidFill>
+                  <a:srgbClr val="1C2833"/>
+                </a:solidFill>
+                <a:latin typeface="Courier New" pitchFamily="34" charset="0"/>
+                <a:ea typeface="Courier New" pitchFamily="34" charset="-122"/>
+                <a:cs typeface="Courier New" pitchFamily="34" charset="-120"/>
+              </a:rPr>
+              <a:t>– Scan: 7 + 3 = 10. Mark dot above 3. Running = 0.</a:t>
+            </a:r>
+            <a:endParaRPr lang="en-US" sz="1100" dirty="0"/>
+          </a:p>
+        </p:txBody>
+      </p:sp>
+      <p:sp>
+        <p:nvSpPr>
+          <p:cNvPr id="8" name="Text 6"/>
+          <p:cNvSpPr/>
+          <p:nvPr/>
+        </p:nvSpPr>
+        <p:spPr>
+          <a:xfrm>
+            <a:off x="631627" y="1359694"/>
+            <a:ext cx="8086939" cy="174575"/>
+          </a:xfrm>
+          <a:prstGeom prst="rect">
+            <a:avLst/>
+          </a:prstGeom>
+          <a:noFill/>
+          <a:ln/>
+        </p:spPr>
+        <p:txBody>
+          <a:bodyPr wrap="square" lIns="0" tIns="0" rIns="0" bIns="0" rtlCol="0" anchor="t"/>
+          <a:lstStyle/>
+          <a:p>
+            <a:pPr algn="l" indent="0" marL="0">
+              <a:lnSpc>
+                <a:spcPts val="1375"/>
+              </a:lnSpc>
+              <a:buNone/>
+            </a:pPr>
+            <a:r>
+              <a:rPr lang="en-US" sz="1100" dirty="0">
+                <a:solidFill>
+                  <a:srgbClr val="1C2833"/>
+                </a:solidFill>
+                <a:latin typeface="Courier New" pitchFamily="34" charset="0"/>
+                <a:ea typeface="Courier New" pitchFamily="34" charset="-122"/>
+                <a:cs typeface="Courier New" pitchFamily="34" charset="-120"/>
+              </a:rPr>
+              <a:t>– 5. Running = 5.</a:t>
+            </a:r>
+            <a:endParaRPr lang="en-US" sz="1100" dirty="0"/>
+          </a:p>
+        </p:txBody>
+      </p:sp>
+      <p:sp>
+        <p:nvSpPr>
+          <p:cNvPr id="9" name="Text 7"/>
+          <p:cNvSpPr/>
+          <p:nvPr/>
+        </p:nvSpPr>
+        <p:spPr>
+          <a:xfrm>
+            <a:off x="631627" y="1534269"/>
+            <a:ext cx="8086939" cy="174575"/>
+          </a:xfrm>
+          <a:prstGeom prst="rect">
+            <a:avLst/>
+          </a:prstGeom>
+          <a:noFill/>
+          <a:ln/>
+        </p:spPr>
+        <p:txBody>
+          <a:bodyPr wrap="square" lIns="0" tIns="0" rIns="0" bIns="0" rtlCol="0" anchor="t"/>
+          <a:lstStyle/>
+          <a:p>
+            <a:pPr algn="l" indent="0" marL="0">
+              <a:lnSpc>
+                <a:spcPts val="1375"/>
+              </a:lnSpc>
+              <a:buNone/>
+            </a:pPr>
+            <a:r>
+              <a:rPr lang="en-US" sz="1100" dirty="0">
+                <a:solidFill>
+                  <a:srgbClr val="1C2833"/>
+                </a:solidFill>
+                <a:latin typeface="Courier New" pitchFamily="34" charset="0"/>
+                <a:ea typeface="Courier New" pitchFamily="34" charset="-122"/>
+                <a:cs typeface="Courier New" pitchFamily="34" charset="-120"/>
+              </a:rPr>
+              <a:t>– 8. Running = 13 → 10-pair found (3 already used). Mark dot above 8. Running = 3.</a:t>
+            </a:r>
+            <a:endParaRPr lang="en-US" sz="1100" dirty="0"/>
+          </a:p>
+        </p:txBody>
+      </p:sp>
+      <p:sp>
+        <p:nvSpPr>
+          <p:cNvPr id="10" name="Text 8"/>
+          <p:cNvSpPr/>
+          <p:nvPr/>
+        </p:nvSpPr>
+        <p:spPr>
+          <a:xfrm>
+            <a:off x="631627" y="1708845"/>
+            <a:ext cx="8086939" cy="174575"/>
+          </a:xfrm>
+          <a:prstGeom prst="rect">
+            <a:avLst/>
+          </a:prstGeom>
+          <a:noFill/>
+          <a:ln/>
+        </p:spPr>
+        <p:txBody>
+          <a:bodyPr wrap="square" lIns="0" tIns="0" rIns="0" bIns="0" rtlCol="0" anchor="t"/>
+          <a:lstStyle/>
+          <a:p>
+            <a:pPr algn="l" indent="0" marL="0">
+              <a:lnSpc>
+                <a:spcPts val="1375"/>
+              </a:lnSpc>
+              <a:buNone/>
+            </a:pPr>
+            <a:r>
+              <a:rPr lang="en-US" sz="1100" dirty="0">
+                <a:solidFill>
+                  <a:srgbClr val="1C2833"/>
+                </a:solidFill>
+                <a:latin typeface="Courier New" pitchFamily="34" charset="0"/>
+                <a:ea typeface="Courier New" pitchFamily="34" charset="-122"/>
+                <a:cs typeface="Courier New" pitchFamily="34" charset="-120"/>
+              </a:rPr>
+              <a:t>– Write 3 under column. Carry 2 dots.</a:t>
+            </a:r>
+            <a:endParaRPr lang="en-US" sz="1100" dirty="0"/>
+          </a:p>
+        </p:txBody>
+      </p:sp>
+      <p:sp>
+        <p:nvSpPr>
+          <p:cNvPr id="11" name="Text 9"/>
           <p:cNvSpPr/>
           <p:nvPr/>
         </p:nvSpPr>
@@ -5248,7 +6401,7 @@
                 <a:ea typeface="Georgia" pitchFamily="34" charset="-122"/>
                 <a:cs typeface="Georgia" pitchFamily="34" charset="-120"/>
               </a:rPr>
-              <a:t>Student-facing content</a:t>
+              <a:t>Activity (20 min) — Pair drills</a:t>
             </a:r>
             <a:endParaRPr lang="en-US" sz="1800" dirty="0"/>
           </a:p>
@@ -5262,455 +6415,191 @@
         </p:nvSpPr>
         <p:spPr>
           <a:xfrm>
-            <a:off x="406301" y="883593"/>
-            <a:ext cx="8331398" cy="1938337"/>
-          </a:xfrm>
-          <a:prstGeom prst="rect">
-            <a:avLst/>
-          </a:prstGeom>
-          <a:solidFill>
-            <a:srgbClr val="F4F8F9"/>
-          </a:solidFill>
-          <a:ln/>
-        </p:spPr>
-        <p:txBody>
-          <a:bodyPr wrap="square" rtlCol="0" anchor="ctr"/>
-          <a:lstStyle/>
-          <a:p>
-            <a:pPr indent="0" marL="0">
-              <a:buNone/>
-            </a:pPr>
-            <a:endParaRPr lang="en-US" dirty="0"/>
-          </a:p>
-        </p:txBody>
-      </p:sp>
-      <p:sp>
-        <p:nvSpPr>
-          <p:cNvPr id="5" name="Shape 3"/>
-          <p:cNvSpPr/>
-          <p:nvPr/>
-        </p:nvSpPr>
-        <p:spPr>
-          <a:xfrm>
-            <a:off x="434876" y="883593"/>
-            <a:ext cx="0" cy="1938337"/>
-          </a:xfrm>
-          <a:prstGeom prst="line">
+            <a:off x="634901" y="883593"/>
+            <a:ext cx="8102798" cy="1257002"/>
+          </a:xfrm>
+          <a:prstGeom prst="rect">
             <a:avLst/>
           </a:prstGeom>
           <a:noFill/>
-          <a:ln w="57150">
-            <a:solidFill>
-              <a:srgbClr val="FE4447"/>
-            </a:solidFill>
-            <a:prstDash val="solid"/>
-          </a:ln>
-        </p:spPr>
+          <a:ln/>
+        </p:spPr>
+        <p:txBody>
+          <a:bodyPr wrap="square" lIns="0" tIns="0" rIns="0" bIns="0" rtlCol="0" anchor="t"/>
+          <a:lstStyle/>
+          <a:p>
+            <a:pPr algn="l" marL="342900" indent="-342900">
+              <a:lnSpc>
+                <a:spcPts val="1620"/>
+              </a:lnSpc>
+              <a:spcAft>
+                <a:spcPts val="300"/>
+              </a:spcAft>
+              <a:buSzPct val="100000"/>
+              <a:buChar char="•"/>
+            </a:pPr>
+            <a:r>
+              <a:rPr lang="en-US" sz="1200" dirty="0">
+                <a:solidFill>
+                  <a:srgbClr val="1C2833"/>
+                </a:solidFill>
+                <a:latin typeface="Arial" pitchFamily="34" charset="0"/>
+                <a:ea typeface="Arial" pitchFamily="34" charset="-122"/>
+                <a:cs typeface="Arial" pitchFamily="34" charset="-120"/>
+              </a:rPr>
+              <a:t>Hand out drill sheets. Each sheet has 10 rows, each row a list of 6–8 digits.</a:t>
+            </a:r>
+            <a:endParaRPr lang="en-US" sz="1200" dirty="0"/>
+          </a:p>
+          <a:p>
+            <a:pPr algn="l" marL="342900" indent="-342900">
+              <a:lnSpc>
+                <a:spcPts val="1620"/>
+              </a:lnSpc>
+              <a:spcAft>
+                <a:spcPts val="300"/>
+              </a:spcAft>
+              <a:buSzPct val="100000"/>
+              <a:buChar char="•"/>
+            </a:pPr>
+            <a:r>
+              <a:rPr lang="en-US" sz="1200" dirty="0">
+                <a:solidFill>
+                  <a:srgbClr val="1C2833"/>
+                </a:solidFill>
+                <a:latin typeface="Arial" pitchFamily="34" charset="0"/>
+                <a:ea typeface="Arial" pitchFamily="34" charset="-122"/>
+                <a:cs typeface="Arial" pitchFamily="34" charset="-120"/>
+              </a:rPr>
+              <a:t>Working in pairs:</a:t>
+            </a:r>
+            <a:endParaRPr lang="en-US" sz="1200" dirty="0"/>
+          </a:p>
+          <a:p>
+            <a:pPr algn="l" marL="342900" indent="-342900">
+              <a:lnSpc>
+                <a:spcPts val="1620"/>
+              </a:lnSpc>
+              <a:spcAft>
+                <a:spcPts val="300"/>
+              </a:spcAft>
+              <a:buSzPct val="100000"/>
+              <a:buChar char="•"/>
+            </a:pPr>
+            <a:r>
+              <a:rPr lang="en-US" sz="1200" dirty="0">
+                <a:solidFill>
+                  <a:srgbClr val="1C2833"/>
+                </a:solidFill>
+                <a:latin typeface="Arial" pitchFamily="34" charset="0"/>
+                <a:ea typeface="Arial" pitchFamily="34" charset="-122"/>
+                <a:cs typeface="Arial" pitchFamily="34" charset="-120"/>
+              </a:rPr>
+              <a:t>Partner A reads a row aloud.</a:t>
+            </a:r>
+            <a:endParaRPr lang="en-US" sz="1200" dirty="0"/>
+          </a:p>
+          <a:p>
+            <a:pPr algn="l" marL="342900" indent="-342900">
+              <a:lnSpc>
+                <a:spcPts val="1620"/>
+              </a:lnSpc>
+              <a:spcAft>
+                <a:spcPts val="300"/>
+              </a:spcAft>
+              <a:buSzPct val="100000"/>
+              <a:buChar char="•"/>
+            </a:pPr>
+            <a:r>
+              <a:rPr lang="en-US" sz="1200" dirty="0">
+                <a:solidFill>
+                  <a:srgbClr val="1C2833"/>
+                </a:solidFill>
+                <a:latin typeface="Arial" pitchFamily="34" charset="0"/>
+                <a:ea typeface="Arial" pitchFamily="34" charset="-122"/>
+                <a:cs typeface="Arial" pitchFamily="34" charset="-120"/>
+              </a:rPr>
+              <a:t>Partner B identifies all 10-pairs in the row in under 10 sec.</a:t>
+            </a:r>
+            <a:endParaRPr lang="en-US" sz="1200" dirty="0"/>
+          </a:p>
+          <a:p>
+            <a:pPr algn="l" marL="342900" indent="-342900">
+              <a:lnSpc>
+                <a:spcPts val="1620"/>
+              </a:lnSpc>
+              <a:spcAft>
+                <a:spcPts val="300"/>
+              </a:spcAft>
+              <a:buSzPct val="100000"/>
+              <a:buChar char="•"/>
+            </a:pPr>
+            <a:r>
+              <a:rPr lang="en-US" sz="1200" dirty="0">
+                <a:solidFill>
+                  <a:srgbClr val="1C2833"/>
+                </a:solidFill>
+                <a:latin typeface="Arial" pitchFamily="34" charset="0"/>
+                <a:ea typeface="Arial" pitchFamily="34" charset="-122"/>
+                <a:cs typeface="Arial" pitchFamily="34" charset="-120"/>
+              </a:rPr>
+              <a:t>Swap roles for the next row.</a:t>
+            </a:r>
+            <a:endParaRPr lang="en-US" sz="1200" dirty="0"/>
+          </a:p>
+        </p:txBody>
+      </p:sp>
+      <p:sp>
+        <p:nvSpPr>
+          <p:cNvPr id="5" name="Text 3"/>
+          <p:cNvSpPr/>
+          <p:nvPr/>
+        </p:nvSpPr>
+        <p:spPr>
+          <a:xfrm>
+            <a:off x="406301" y="2229445"/>
+            <a:ext cx="8498026" cy="213271"/>
+          </a:xfrm>
+          <a:prstGeom prst="rect">
+            <a:avLst/>
+          </a:prstGeom>
+          <a:noFill/>
+          <a:ln/>
+        </p:spPr>
+        <p:txBody>
+          <a:bodyPr wrap="square" lIns="0" tIns="0" rIns="0" bIns="0" rtlCol="0" anchor="t"/>
+          <a:lstStyle/>
+          <a:p>
+            <a:pPr algn="l" indent="0" marL="0">
+              <a:lnSpc>
+                <a:spcPts val="1680"/>
+              </a:lnSpc>
+              <a:spcBef>
+                <a:spcPts val="300"/>
+              </a:spcBef>
+              <a:spcAft>
+                <a:spcPts val="300"/>
+              </a:spcAft>
+              <a:buNone/>
+            </a:pPr>
+            <a:r>
+              <a:rPr lang="en-US" sz="1200" dirty="0">
+                <a:solidFill>
+                  <a:srgbClr val="1C2833"/>
+                </a:solidFill>
+                <a:latin typeface="Arial" pitchFamily="34" charset="0"/>
+                <a:ea typeface="Arial" pitchFamily="34" charset="-122"/>
+                <a:cs typeface="Arial" pitchFamily="34" charset="-120"/>
+              </a:rPr>
+              <a:t>Suggested rows:</a:t>
+            </a:r>
+            <a:endParaRPr lang="en-US" sz="1200" dirty="0"/>
+          </a:p>
+        </p:txBody>
       </p:sp>
       <p:sp>
         <p:nvSpPr>
           <p:cNvPr id="6" name="Text 4"/>
-          <p:cNvSpPr/>
-          <p:nvPr/>
-        </p:nvSpPr>
-        <p:spPr>
-          <a:xfrm>
-            <a:off x="692051" y="1074093"/>
-            <a:ext cx="7973389" cy="230981"/>
-          </a:xfrm>
-          <a:prstGeom prst="rect">
-            <a:avLst/>
-          </a:prstGeom>
-          <a:noFill/>
-          <a:ln/>
-        </p:spPr>
-        <p:txBody>
-          <a:bodyPr wrap="square" lIns="0" tIns="0" rIns="0" bIns="0" rtlCol="0" anchor="t"/>
-          <a:lstStyle/>
-          <a:p>
-            <a:pPr algn="l" indent="0" marL="0">
-              <a:lnSpc>
-                <a:spcPts val="1820"/>
-              </a:lnSpc>
-              <a:spcBef>
-                <a:spcPts val="300"/>
-              </a:spcBef>
-              <a:spcAft>
-                <a:spcPts val="300"/>
-              </a:spcAft>
-              <a:buNone/>
-            </a:pPr>
-            <a:r>
-              <a:rPr lang="en-US" sz="1300" b="1" i="1" dirty="0">
-                <a:solidFill>
-                  <a:srgbClr val="1C2833"/>
-                </a:solidFill>
-                <a:latin typeface="Georgia" pitchFamily="34" charset="0"/>
-                <a:ea typeface="Georgia" pitchFamily="34" charset="-122"/>
-                <a:cs typeface="Georgia" pitchFamily="34" charset="-120"/>
-              </a:rPr>
-              <a:t>The Five 10-Pairs</a:t>
-            </a:r>
-            <a:endParaRPr lang="en-US" sz="1300" dirty="0"/>
-          </a:p>
-        </p:txBody>
-      </p:sp>
-      <p:sp>
-        <p:nvSpPr>
-          <p:cNvPr id="7" name="Text 5"/>
-          <p:cNvSpPr/>
-          <p:nvPr/>
-        </p:nvSpPr>
-        <p:spPr>
-          <a:xfrm>
-            <a:off x="692051" y="1343174"/>
-            <a:ext cx="7973389" cy="230981"/>
-          </a:xfrm>
-          <a:prstGeom prst="rect">
-            <a:avLst/>
-          </a:prstGeom>
-          <a:noFill/>
-          <a:ln/>
-        </p:spPr>
-        <p:txBody>
-          <a:bodyPr wrap="square" lIns="0" tIns="0" rIns="0" bIns="0" rtlCol="0" anchor="t"/>
-          <a:lstStyle/>
-          <a:p>
-            <a:pPr algn="l" indent="0" marL="0">
-              <a:lnSpc>
-                <a:spcPts val="1820"/>
-              </a:lnSpc>
-              <a:spcBef>
-                <a:spcPts val="300"/>
-              </a:spcBef>
-              <a:spcAft>
-                <a:spcPts val="300"/>
-              </a:spcAft>
-              <a:buNone/>
-            </a:pPr>
-            <a:r>
-              <a:rPr lang="en-US" sz="1300" i="1" dirty="0">
-                <a:solidFill>
-                  <a:srgbClr val="1C2833"/>
-                </a:solidFill>
-                <a:latin typeface="Georgia" pitchFamily="34" charset="0"/>
-                <a:ea typeface="Georgia" pitchFamily="34" charset="-122"/>
-                <a:cs typeface="Georgia" pitchFamily="34" charset="-120"/>
-              </a:rPr>
-              <a:t>| 1 + 9 | 2 + 8 | 3 + 7 | 4 + 6 | 5 + 5 | |---|---|---|---|---|</a:t>
-            </a:r>
-            <a:endParaRPr lang="en-US" sz="1300" dirty="0"/>
-          </a:p>
-        </p:txBody>
-      </p:sp>
-      <p:sp>
-        <p:nvSpPr>
-          <p:cNvPr id="8" name="Text 6"/>
-          <p:cNvSpPr/>
-          <p:nvPr/>
-        </p:nvSpPr>
-        <p:spPr>
-          <a:xfrm>
-            <a:off x="692051" y="1612255"/>
-            <a:ext cx="7973389" cy="461963"/>
-          </a:xfrm>
-          <a:prstGeom prst="rect">
-            <a:avLst/>
-          </a:prstGeom>
-          <a:noFill/>
-          <a:ln/>
-        </p:spPr>
-        <p:txBody>
-          <a:bodyPr wrap="square" lIns="0" tIns="0" rIns="0" bIns="0" rtlCol="0" anchor="t"/>
-          <a:lstStyle/>
-          <a:p>
-            <a:pPr algn="l" indent="0" marL="0">
-              <a:lnSpc>
-                <a:spcPts val="1820"/>
-              </a:lnSpc>
-              <a:spcBef>
-                <a:spcPts val="300"/>
-              </a:spcBef>
-              <a:spcAft>
-                <a:spcPts val="300"/>
-              </a:spcAft>
-              <a:buNone/>
-            </a:pPr>
-            <a:r>
-              <a:rPr lang="en-US" sz="1300" dirty="0">
-                <a:solidFill>
-                  <a:srgbClr val="1C2833"/>
-                </a:solidFill>
-                <a:latin typeface="Georgia" pitchFamily="34" charset="0"/>
-                <a:ea typeface="Georgia" pitchFamily="34" charset="-122"/>
-                <a:cs typeface="Georgia" pitchFamily="34" charset="-120"/>
-              </a:rPr>
-              <a:t>Practice until you can name the partner of any single digit </a:t>
-            </a:r>
-            <a:pPr algn="l" indent="0" marL="0">
-              <a:lnSpc>
-                <a:spcPts val="1820"/>
-              </a:lnSpc>
-              <a:spcBef>
-                <a:spcPts val="300"/>
-              </a:spcBef>
-              <a:spcAft>
-                <a:spcPts val="300"/>
-              </a:spcAft>
-              <a:buNone/>
-            </a:pPr>
-            <a:r>
-              <a:rPr lang="en-US" sz="1300" i="1" dirty="0">
-                <a:solidFill>
-                  <a:srgbClr val="1C2833"/>
-                </a:solidFill>
-                <a:latin typeface="Georgia" pitchFamily="34" charset="0"/>
-                <a:ea typeface="Georgia" pitchFamily="34" charset="-122"/>
-                <a:cs typeface="Georgia" pitchFamily="34" charset="-120"/>
-              </a:rPr>
-              <a:t>instantly</a:t>
-            </a:r>
-            <a:pPr algn="l" indent="0" marL="0">
-              <a:lnSpc>
-                <a:spcPts val="1820"/>
-              </a:lnSpc>
-              <a:spcBef>
-                <a:spcPts val="300"/>
-              </a:spcBef>
-              <a:spcAft>
-                <a:spcPts val="300"/>
-              </a:spcAft>
-              <a:buNone/>
-            </a:pPr>
-            <a:r>
-              <a:rPr lang="en-US" sz="1300" dirty="0">
-                <a:solidFill>
-                  <a:srgbClr val="1C2833"/>
-                </a:solidFill>
-                <a:latin typeface="Georgia" pitchFamily="34" charset="0"/>
-                <a:ea typeface="Georgia" pitchFamily="34" charset="-122"/>
-                <a:cs typeface="Georgia" pitchFamily="34" charset="-120"/>
-              </a:rPr>
-              <a:t> — no thinking. This is the foundational skill of the dot method.</a:t>
-            </a:r>
-            <a:endParaRPr lang="en-US" sz="1300" dirty="0"/>
-          </a:p>
-        </p:txBody>
-      </p:sp>
-      <p:sp>
-        <p:nvSpPr>
-          <p:cNvPr id="9" name="Text 7"/>
-          <p:cNvSpPr/>
-          <p:nvPr/>
-        </p:nvSpPr>
-        <p:spPr>
-          <a:xfrm>
-            <a:off x="692051" y="2112318"/>
-            <a:ext cx="7973389" cy="230981"/>
-          </a:xfrm>
-          <a:prstGeom prst="rect">
-            <a:avLst/>
-          </a:prstGeom>
-          <a:noFill/>
-          <a:ln/>
-        </p:spPr>
-        <p:txBody>
-          <a:bodyPr wrap="square" lIns="0" tIns="0" rIns="0" bIns="0" rtlCol="0" anchor="t"/>
-          <a:lstStyle/>
-          <a:p>
-            <a:pPr algn="l" indent="0" marL="0">
-              <a:lnSpc>
-                <a:spcPts val="1820"/>
-              </a:lnSpc>
-              <a:spcBef>
-                <a:spcPts val="300"/>
-              </a:spcBef>
-              <a:spcAft>
-                <a:spcPts val="300"/>
-              </a:spcAft>
-              <a:buNone/>
-            </a:pPr>
-            <a:r>
-              <a:rPr lang="en-US" sz="1300" b="1" i="1" dirty="0">
-                <a:solidFill>
-                  <a:srgbClr val="1C2833"/>
-                </a:solidFill>
-                <a:latin typeface="Georgia" pitchFamily="34" charset="0"/>
-                <a:ea typeface="Georgia" pitchFamily="34" charset="-122"/>
-                <a:cs typeface="Georgia" pitchFamily="34" charset="-120"/>
-              </a:rPr>
-              <a:t>Drill:</a:t>
-            </a:r>
-            <a:pPr algn="l" indent="0" marL="0">
-              <a:lnSpc>
-                <a:spcPts val="1820"/>
-              </a:lnSpc>
-              <a:spcBef>
-                <a:spcPts val="300"/>
-              </a:spcBef>
-              <a:spcAft>
-                <a:spcPts val="300"/>
-              </a:spcAft>
-              <a:buNone/>
-            </a:pPr>
-            <a:r>
-              <a:rPr lang="en-US" sz="1300" dirty="0">
-                <a:solidFill>
-                  <a:srgbClr val="1C2833"/>
-                </a:solidFill>
-                <a:latin typeface="Georgia" pitchFamily="34" charset="0"/>
-                <a:ea typeface="Georgia" pitchFamily="34" charset="-122"/>
-                <a:cs typeface="Georgia" pitchFamily="34" charset="-120"/>
-              </a:rPr>
-              <a:t> in a row of 6–8 digits, scan and circle every 10-pair you can find. Write what's "left over."</a:t>
-            </a:r>
-            <a:endParaRPr lang="en-US" sz="1300" dirty="0"/>
-          </a:p>
-        </p:txBody>
-      </p:sp>
-      <p:sp>
-        <p:nvSpPr>
-          <p:cNvPr id="10" name="Text 8"/>
-          <p:cNvSpPr/>
-          <p:nvPr/>
-        </p:nvSpPr>
-        <p:spPr>
-          <a:xfrm>
-            <a:off x="692051" y="2381399"/>
-            <a:ext cx="7973389" cy="250031"/>
-          </a:xfrm>
-          <a:prstGeom prst="rect">
-            <a:avLst/>
-          </a:prstGeom>
-          <a:noFill/>
-          <a:ln/>
-        </p:spPr>
-        <p:txBody>
-          <a:bodyPr wrap="square" lIns="0" tIns="0" rIns="0" bIns="0" rtlCol="0" anchor="t"/>
-          <a:lstStyle/>
-          <a:p>
-            <a:pPr algn="l" indent="0" marL="0">
-              <a:lnSpc>
-                <a:spcPts val="1820"/>
-              </a:lnSpc>
-              <a:spcBef>
-                <a:spcPts val="300"/>
-              </a:spcBef>
-              <a:spcAft>
-                <a:spcPts val="300"/>
-              </a:spcAft>
-              <a:buNone/>
-            </a:pPr>
-            <a:r>
-              <a:rPr lang="en-US" sz="1300" dirty="0">
-                <a:solidFill>
-                  <a:srgbClr val="1C2833"/>
-                </a:solidFill>
-                <a:latin typeface="Georgia" pitchFamily="34" charset="0"/>
-                <a:ea typeface="Georgia" pitchFamily="34" charset="-122"/>
-                <a:cs typeface="Georgia" pitchFamily="34" charset="-120"/>
-              </a:rPr>
-              <a:t>Example: in </a:t>
-            </a:r>
-            <a:pPr algn="l" indent="0" marL="0">
-              <a:lnSpc>
-                <a:spcPts val="1820"/>
-              </a:lnSpc>
-              <a:spcBef>
-                <a:spcPts val="300"/>
-              </a:spcBef>
-              <a:spcAft>
-                <a:spcPts val="300"/>
-              </a:spcAft>
-              <a:buNone/>
-            </a:pPr>
-            <a:r>
-              <a:rPr lang="en-US" sz="1300" i="1" dirty="0">
-                <a:solidFill>
-                  <a:srgbClr val="1C2833"/>
-                </a:solidFill>
-                <a:latin typeface="Georgia" pitchFamily="34" charset="0"/>
-                <a:ea typeface="Georgia" pitchFamily="34" charset="-122"/>
-                <a:cs typeface="Georgia" pitchFamily="34" charset="-120"/>
-              </a:rPr>
-              <a:t>3 7 2 5 8 1 4 6</a:t>
-            </a:r>
-            <a:pPr algn="l" indent="0" marL="0">
-              <a:lnSpc>
-                <a:spcPts val="1820"/>
-              </a:lnSpc>
-              <a:spcBef>
-                <a:spcPts val="300"/>
-              </a:spcBef>
-              <a:spcAft>
-                <a:spcPts val="300"/>
-              </a:spcAft>
-              <a:buNone/>
-            </a:pPr>
-            <a:r>
-              <a:rPr lang="en-US" sz="1300" dirty="0">
-                <a:solidFill>
-                  <a:srgbClr val="1C2833"/>
-                </a:solidFill>
-                <a:latin typeface="Georgia" pitchFamily="34" charset="0"/>
-                <a:ea typeface="Georgia" pitchFamily="34" charset="-122"/>
-                <a:cs typeface="Georgia" pitchFamily="34" charset="-120"/>
-              </a:rPr>
-              <a:t>, you can find: 3+7, 2+8, 4+6 — three pairs, leftover is </a:t>
-            </a:r>
-            <a:pPr algn="l" indent="0" marL="0">
-              <a:lnSpc>
-                <a:spcPts val="1820"/>
-              </a:lnSpc>
-              <a:spcBef>
-                <a:spcPts val="300"/>
-              </a:spcBef>
-              <a:spcAft>
-                <a:spcPts val="300"/>
-              </a:spcAft>
-              <a:buNone/>
-            </a:pPr>
-            <a:r>
-              <a:rPr lang="en-US" sz="1300" i="1" dirty="0">
-                <a:solidFill>
-                  <a:srgbClr val="1C2833"/>
-                </a:solidFill>
-                <a:latin typeface="Georgia" pitchFamily="34" charset="0"/>
-                <a:ea typeface="Georgia" pitchFamily="34" charset="-122"/>
-                <a:cs typeface="Georgia" pitchFamily="34" charset="-120"/>
-              </a:rPr>
-              <a:t>5 1</a:t>
-            </a:r>
-            <a:pPr algn="l" indent="0" marL="0">
-              <a:lnSpc>
-                <a:spcPts val="1820"/>
-              </a:lnSpc>
-              <a:spcBef>
-                <a:spcPts val="300"/>
-              </a:spcBef>
-              <a:spcAft>
-                <a:spcPts val="300"/>
-              </a:spcAft>
-              <a:buNone/>
-            </a:pPr>
-            <a:r>
-              <a:rPr lang="en-US" sz="1300" dirty="0">
-                <a:solidFill>
-                  <a:srgbClr val="1C2833"/>
-                </a:solidFill>
-                <a:latin typeface="Georgia" pitchFamily="34" charset="0"/>
-                <a:ea typeface="Georgia" pitchFamily="34" charset="-122"/>
-                <a:cs typeface="Georgia" pitchFamily="34" charset="-120"/>
-              </a:rPr>
-              <a:t>.</a:t>
-            </a:r>
-            <a:endParaRPr lang="en-US" sz="1300" dirty="0"/>
-          </a:p>
-        </p:txBody>
-      </p:sp>
-      <p:sp>
-        <p:nvSpPr>
-          <p:cNvPr id="11" name="Text 9"/>
           <p:cNvSpPr/>
           <p:nvPr/>
         </p:nvSpPr>
@@ -5860,7 +6749,7 @@
                 <a:ea typeface="Georgia" pitchFamily="34" charset="-122"/>
                 <a:cs typeface="Georgia" pitchFamily="34" charset="-120"/>
               </a:rPr>
-              <a:t>Homework</a:t>
+              <a:t>Activity (20 min) — Pair drills (cont.)</a:t>
             </a:r>
             <a:endParaRPr lang="en-US" sz="1800" dirty="0"/>
           </a:p>
@@ -5874,13 +6763,66 @@
         </p:nvSpPr>
         <p:spPr>
           <a:xfrm>
-            <a:off x="406301" y="870942"/>
-            <a:ext cx="8498026" cy="426541"/>
-          </a:xfrm>
-          <a:prstGeom prst="rect">
+            <a:off x="406301" y="883593"/>
+            <a:ext cx="8331398" cy="1126778"/>
+          </a:xfrm>
+          <a:prstGeom prst="rect">
+            <a:avLst/>
+          </a:prstGeom>
+          <a:solidFill>
+            <a:srgbClr val="F4F8F9"/>
+          </a:solidFill>
+          <a:ln/>
+        </p:spPr>
+        <p:txBody>
+          <a:bodyPr wrap="square" rtlCol="0" anchor="ctr"/>
+          <a:lstStyle/>
+          <a:p>
+            <a:pPr indent="0" marL="0">
+              <a:buNone/>
+            </a:pPr>
+            <a:endParaRPr lang="en-US" dirty="0"/>
+          </a:p>
+        </p:txBody>
+      </p:sp>
+      <p:sp>
+        <p:nvSpPr>
+          <p:cNvPr id="5" name="Shape 3"/>
+          <p:cNvSpPr/>
+          <p:nvPr/>
+        </p:nvSpPr>
+        <p:spPr>
+          <a:xfrm>
+            <a:off x="430113" y="883593"/>
+            <a:ext cx="0" cy="1126778"/>
+          </a:xfrm>
+          <a:prstGeom prst="line">
             <a:avLst/>
           </a:prstGeom>
           <a:noFill/>
+          <a:ln w="47625">
+            <a:solidFill>
+              <a:srgbClr val="277884"/>
+            </a:solidFill>
+            <a:prstDash val="solid"/>
+          </a:ln>
+        </p:spPr>
+      </p:sp>
+      <p:sp>
+        <p:nvSpPr>
+          <p:cNvPr id="6" name="Text 4"/>
+          <p:cNvSpPr/>
+          <p:nvPr/>
+        </p:nvSpPr>
+        <p:spPr>
+          <a:xfrm>
+            <a:off x="631627" y="1010543"/>
+            <a:ext cx="8086939" cy="174575"/>
+          </a:xfrm>
+          <a:prstGeom prst="rect">
+            <a:avLst/>
+          </a:prstGeom>
+          <a:noFill/>
           <a:ln/>
         </p:spPr>
         <p:txBody>
@@ -5889,34 +6831,196 @@
           <a:p>
             <a:pPr algn="l" indent="0" marL="0">
               <a:lnSpc>
-                <a:spcPts val="1680"/>
-              </a:lnSpc>
-              <a:spcBef>
-                <a:spcPts val="300"/>
-              </a:spcBef>
-              <a:spcAft>
-                <a:spcPts val="300"/>
-              </a:spcAft>
-              <a:buNone/>
-            </a:pPr>
-            <a:r>
-              <a:rPr lang="en-US" sz="1200" dirty="0">
-                <a:solidFill>
-                  <a:srgbClr val="1C2833"/>
-                </a:solidFill>
-                <a:latin typeface="Arial" pitchFamily="34" charset="0"/>
-                <a:ea typeface="Arial" pitchFamily="34" charset="-122"/>
-                <a:cs typeface="Arial" pitchFamily="34" charset="-120"/>
-              </a:rPr>
-              <a:t>– Practice the 10-pair recall. Have a parent or sibling call out single digits; you answer the partner. Beat 20 digits in 30 seconds. – Continue: in any list of 6 digits, find all 10-pairs in under 10 sec.</a:t>
-            </a:r>
-            <a:endParaRPr lang="en-US" sz="1200" dirty="0"/>
-          </a:p>
-        </p:txBody>
-      </p:sp>
-      <p:sp>
-        <p:nvSpPr>
-          <p:cNvPr id="5" name="Text 3"/>
+                <a:spcPts val="1375"/>
+              </a:lnSpc>
+              <a:buNone/>
+            </a:pPr>
+            <a:r>
+              <a:rPr lang="en-US" sz="1100" dirty="0">
+                <a:solidFill>
+                  <a:srgbClr val="1C2833"/>
+                </a:solidFill>
+                <a:latin typeface="Courier New" pitchFamily="34" charset="0"/>
+                <a:ea typeface="Courier New" pitchFamily="34" charset="-122"/>
+                <a:cs typeface="Courier New" pitchFamily="34" charset="-120"/>
+              </a:rPr>
+              <a:t>Row 1: 3 7 2 5 8 1 4 6</a:t>
+            </a:r>
+            <a:endParaRPr lang="en-US" sz="1100" dirty="0"/>
+          </a:p>
+        </p:txBody>
+      </p:sp>
+      <p:sp>
+        <p:nvSpPr>
+          <p:cNvPr id="7" name="Text 5"/>
+          <p:cNvSpPr/>
+          <p:nvPr/>
+        </p:nvSpPr>
+        <p:spPr>
+          <a:xfrm>
+            <a:off x="631627" y="1185118"/>
+            <a:ext cx="8086939" cy="174575"/>
+          </a:xfrm>
+          <a:prstGeom prst="rect">
+            <a:avLst/>
+          </a:prstGeom>
+          <a:noFill/>
+          <a:ln/>
+        </p:spPr>
+        <p:txBody>
+          <a:bodyPr wrap="square" lIns="0" tIns="0" rIns="0" bIns="0" rtlCol="0" anchor="t"/>
+          <a:lstStyle/>
+          <a:p>
+            <a:pPr algn="l" indent="0" marL="0">
+              <a:lnSpc>
+                <a:spcPts val="1375"/>
+              </a:lnSpc>
+              <a:buNone/>
+            </a:pPr>
+            <a:r>
+              <a:rPr lang="en-US" sz="1100" dirty="0">
+                <a:solidFill>
+                  <a:srgbClr val="1C2833"/>
+                </a:solidFill>
+                <a:latin typeface="Courier New" pitchFamily="34" charset="0"/>
+                <a:ea typeface="Courier New" pitchFamily="34" charset="-122"/>
+                <a:cs typeface="Courier New" pitchFamily="34" charset="-120"/>
+              </a:rPr>
+              <a:t>Row 2: 9 4 1 2 8 5 3 7</a:t>
+            </a:r>
+            <a:endParaRPr lang="en-US" sz="1100" dirty="0"/>
+          </a:p>
+        </p:txBody>
+      </p:sp>
+      <p:sp>
+        <p:nvSpPr>
+          <p:cNvPr id="8" name="Text 6"/>
+          <p:cNvSpPr/>
+          <p:nvPr/>
+        </p:nvSpPr>
+        <p:spPr>
+          <a:xfrm>
+            <a:off x="631627" y="1359694"/>
+            <a:ext cx="8086939" cy="174575"/>
+          </a:xfrm>
+          <a:prstGeom prst="rect">
+            <a:avLst/>
+          </a:prstGeom>
+          <a:noFill/>
+          <a:ln/>
+        </p:spPr>
+        <p:txBody>
+          <a:bodyPr wrap="square" lIns="0" tIns="0" rIns="0" bIns="0" rtlCol="0" anchor="t"/>
+          <a:lstStyle/>
+          <a:p>
+            <a:pPr algn="l" indent="0" marL="0">
+              <a:lnSpc>
+                <a:spcPts val="1375"/>
+              </a:lnSpc>
+              <a:buNone/>
+            </a:pPr>
+            <a:r>
+              <a:rPr lang="en-US" sz="1100" dirty="0">
+                <a:solidFill>
+                  <a:srgbClr val="1C2833"/>
+                </a:solidFill>
+                <a:latin typeface="Courier New" pitchFamily="34" charset="0"/>
+                <a:ea typeface="Courier New" pitchFamily="34" charset="-122"/>
+                <a:cs typeface="Courier New" pitchFamily="34" charset="-120"/>
+              </a:rPr>
+              <a:t>Row 3: 5 5 6 4 1 9 2 8</a:t>
+            </a:r>
+            <a:endParaRPr lang="en-US" sz="1100" dirty="0"/>
+          </a:p>
+        </p:txBody>
+      </p:sp>
+      <p:sp>
+        <p:nvSpPr>
+          <p:cNvPr id="9" name="Text 7"/>
+          <p:cNvSpPr/>
+          <p:nvPr/>
+        </p:nvSpPr>
+        <p:spPr>
+          <a:xfrm>
+            <a:off x="631627" y="1534269"/>
+            <a:ext cx="8086939" cy="174575"/>
+          </a:xfrm>
+          <a:prstGeom prst="rect">
+            <a:avLst/>
+          </a:prstGeom>
+          <a:noFill/>
+          <a:ln/>
+        </p:spPr>
+        <p:txBody>
+          <a:bodyPr wrap="square" lIns="0" tIns="0" rIns="0" bIns="0" rtlCol="0" anchor="t"/>
+          <a:lstStyle/>
+          <a:p>
+            <a:pPr algn="l" indent="0" marL="0">
+              <a:lnSpc>
+                <a:spcPts val="1375"/>
+              </a:lnSpc>
+              <a:buNone/>
+            </a:pPr>
+            <a:r>
+              <a:rPr lang="en-US" sz="1100" dirty="0">
+                <a:solidFill>
+                  <a:srgbClr val="1C2833"/>
+                </a:solidFill>
+                <a:latin typeface="Courier New" pitchFamily="34" charset="0"/>
+                <a:ea typeface="Courier New" pitchFamily="34" charset="-122"/>
+                <a:cs typeface="Courier New" pitchFamily="34" charset="-120"/>
+              </a:rPr>
+              <a:t>Row 4: 7 3 6 1 9 8 2 4</a:t>
+            </a:r>
+            <a:endParaRPr lang="en-US" sz="1100" dirty="0"/>
+          </a:p>
+        </p:txBody>
+      </p:sp>
+      <p:sp>
+        <p:nvSpPr>
+          <p:cNvPr id="10" name="Text 8"/>
+          <p:cNvSpPr/>
+          <p:nvPr/>
+        </p:nvSpPr>
+        <p:spPr>
+          <a:xfrm>
+            <a:off x="631627" y="1708845"/>
+            <a:ext cx="8086939" cy="174575"/>
+          </a:xfrm>
+          <a:prstGeom prst="rect">
+            <a:avLst/>
+          </a:prstGeom>
+          <a:noFill/>
+          <a:ln/>
+        </p:spPr>
+        <p:txBody>
+          <a:bodyPr wrap="square" lIns="0" tIns="0" rIns="0" bIns="0" rtlCol="0" anchor="t"/>
+          <a:lstStyle/>
+          <a:p>
+            <a:pPr algn="l" indent="0" marL="0">
+              <a:lnSpc>
+                <a:spcPts val="1375"/>
+              </a:lnSpc>
+              <a:buNone/>
+            </a:pPr>
+            <a:r>
+              <a:rPr lang="en-US" sz="1100" dirty="0">
+                <a:solidFill>
+                  <a:srgbClr val="1C2833"/>
+                </a:solidFill>
+                <a:latin typeface="Courier New" pitchFamily="34" charset="0"/>
+                <a:ea typeface="Courier New" pitchFamily="34" charset="-122"/>
+                <a:cs typeface="Courier New" pitchFamily="34" charset="-120"/>
+              </a:rPr>
+              <a:t>...</a:t>
+            </a:r>
+            <a:endParaRPr lang="en-US" sz="1100" dirty="0"/>
+          </a:p>
+        </p:txBody>
+      </p:sp>
+      <p:sp>
+        <p:nvSpPr>
+          <p:cNvPr id="11" name="Text 9"/>
           <p:cNvSpPr/>
           <p:nvPr/>
         </p:nvSpPr>
